--- a/Pregrado/Trabajo de grado 2/Clases/Presentacion del Curso - Trabajo de Grado 2.pptx
+++ b/Pregrado/Trabajo de grado 2/Clases/Presentacion del Curso - Trabajo de Grado 2.pptx
@@ -3400,6 +3400,24 @@
               </a:rPr>
               <a:t>Lunes, 5:00 pm – 6:00 pm</a:t>
             </a:r>
+            <a:r>
+              <a:rPr sz="1500" b="0" i="0">
+                <a:solidFill>
+                  <a:srgbClr val="2B2B2B"/>
+                </a:solidFill>
+                <a:latin typeface="Calibri"/>
+              </a:rPr>
+              <a:t> · inicio efectivo </a:t>
+            </a:r>
+            <a:r>
+              <a:rPr sz="1500" b="1" i="0">
+                <a:solidFill>
+                  <a:srgbClr val="2B2B2B"/>
+                </a:solidFill>
+                <a:latin typeface="Calibri"/>
+              </a:rPr>
+              <a:t>5:10 pm</a:t>
+            </a:r>
           </a:p>
           <a:p>
             <a:pPr>
@@ -3551,41 +3569,6 @@
                 <a:latin typeface="Calibri"/>
               </a:rPr>
               <a:t>⚠️ Syllabus SIAC pendiente — contenido orientativo.</a:t>
-            </a:r>
-          </a:p>
-        </p:txBody>
-      </p:sp>
-      <p:sp>
-        <p:nvSpPr>
-          <p:cNvPr id="7" name="TextBox 6"/>
-          <p:cNvSpPr txBox="1"/>
-          <p:nvPr/>
-        </p:nvSpPr>
-        <p:spPr>
-          <a:xfrm>
-            <a:off x="2194560" y="6446520"/>
-            <a:ext cx="5943600" cy="274320"/>
-          </a:xfrm>
-          <a:prstGeom prst="rect">
-            <a:avLst/>
-          </a:prstGeom>
-          <a:noFill/>
-        </p:spPr>
-        <p:txBody>
-          <a:bodyPr wrap="square" anchor="t" lIns="0" rIns="0" tIns="0" bIns="0">
-            <a:spAutoFit/>
-          </a:bodyPr>
-          <a:lstStyle/>
-          <a:p>
-            <a:pPr algn="l"/>
-            <a:r>
-              <a:rPr sz="1000" b="1" i="0">
-                <a:solidFill>
-                  <a:srgbClr val="8F989D"/>
-                </a:solidFill>
-                <a:latin typeface="Calibri"/>
-              </a:rPr>
-              <a:t>Inicio 5:10 pm</a:t>
             </a:r>
           </a:p>
         </p:txBody>
@@ -3867,7 +3850,7 @@
                 </a:solidFill>
                 <a:latin typeface="Calibri"/>
               </a:rPr>
-              <a:t> (archivo local): `Cursos/Plantilla_APA_CUN_Proyecto de grado.docx`.</a:t>
+              <a:t> (viene en tu carpeta del curso): `Recursos/Plantilla_APA_CUN_Proyecto de grado.docx`.</a:t>
             </a:r>
           </a:p>
           <a:p>
@@ -3892,7 +3875,7 @@
                 </a:solidFill>
                 <a:latin typeface="Calibri"/>
               </a:rPr>
-              <a:t>URL pública Plantilla APA:</a:t>
+              <a:t>Plantilla APA CUN (en tu carpeta):</a:t>
             </a:r>
             <a:r>
               <a:rPr sz="1600" b="0" i="0">
@@ -3901,7 +3884,7 @@
                 </a:solidFill>
                 <a:latin typeface="Calibri"/>
               </a:rPr>
-              <a:t> [URL Drive/Moodle de la Plantilla APA CUN — pendiente]</a:t>
+              <a:t> `Recursos/Plantilla_APA_CUN_Proyecto de grado.docx`</a:t>
             </a:r>
           </a:p>
           <a:p>
@@ -4011,41 +3994,6 @@
       <p:sp>
         <p:nvSpPr>
           <p:cNvPr id="5" name="TextBox 4"/>
-          <p:cNvSpPr txBox="1"/>
-          <p:nvPr/>
-        </p:nvSpPr>
-        <p:spPr>
-          <a:xfrm>
-            <a:off x="2194560" y="6446520"/>
-            <a:ext cx="5943600" cy="274320"/>
-          </a:xfrm>
-          <a:prstGeom prst="rect">
-            <a:avLst/>
-          </a:prstGeom>
-          <a:noFill/>
-        </p:spPr>
-        <p:txBody>
-          <a:bodyPr wrap="square" anchor="t" lIns="0" rIns="0" tIns="0" bIns="0">
-            <a:spAutoFit/>
-          </a:bodyPr>
-          <a:lstStyle/>
-          <a:p>
-            <a:pPr algn="l"/>
-            <a:r>
-              <a:rPr sz="1000" b="1" i="0">
-                <a:solidFill>
-                  <a:srgbClr val="8F989D"/>
-                </a:solidFill>
-                <a:latin typeface="Calibri"/>
-              </a:rPr>
-              <a:t>Inicio 5:10 pm</a:t>
-            </a:r>
-          </a:p>
-        </p:txBody>
-      </p:sp>
-      <p:sp>
-        <p:nvSpPr>
-          <p:cNvPr id="6" name="TextBox 5"/>
           <p:cNvSpPr txBox="1"/>
           <p:nvPr/>
         </p:nvSpPr>
@@ -4315,41 +4263,6 @@
           </a:p>
         </p:txBody>
       </p:sp>
-      <p:sp>
-        <p:nvSpPr>
-          <p:cNvPr id="7" name="TextBox 6"/>
-          <p:cNvSpPr txBox="1"/>
-          <p:nvPr/>
-        </p:nvSpPr>
-        <p:spPr>
-          <a:xfrm>
-            <a:off x="2194560" y="6446520"/>
-            <a:ext cx="5943600" cy="274320"/>
-          </a:xfrm>
-          <a:prstGeom prst="rect">
-            <a:avLst/>
-          </a:prstGeom>
-          <a:noFill/>
-        </p:spPr>
-        <p:txBody>
-          <a:bodyPr wrap="square" anchor="t" lIns="0" rIns="0" tIns="0" bIns="0">
-            <a:spAutoFit/>
-          </a:bodyPr>
-          <a:lstStyle/>
-          <a:p>
-            <a:pPr algn="l"/>
-            <a:r>
-              <a:rPr sz="1000" b="1" i="0">
-                <a:solidFill>
-                  <a:srgbClr val="8F989D"/>
-                </a:solidFill>
-                <a:latin typeface="Calibri"/>
-              </a:rPr>
-              <a:t>Inicio 5:10 pm</a:t>
-            </a:r>
-          </a:p>
-        </p:txBody>
-      </p:sp>
     </p:spTree>
   </p:cSld>
   <p:clrMapOvr>
@@ -4632,41 +4545,6 @@
         </p:nvSpPr>
         <p:spPr>
           <a:xfrm>
-            <a:off x="2194560" y="6446520"/>
-            <a:ext cx="5943600" cy="274320"/>
-          </a:xfrm>
-          <a:prstGeom prst="rect">
-            <a:avLst/>
-          </a:prstGeom>
-          <a:noFill/>
-        </p:spPr>
-        <p:txBody>
-          <a:bodyPr wrap="square" anchor="t" lIns="0" rIns="0" tIns="0" bIns="0">
-            <a:spAutoFit/>
-          </a:bodyPr>
-          <a:lstStyle/>
-          <a:p>
-            <a:pPr algn="l"/>
-            <a:r>
-              <a:rPr sz="1000" b="1" i="0">
-                <a:solidFill>
-                  <a:srgbClr val="8F989D"/>
-                </a:solidFill>
-                <a:latin typeface="Calibri"/>
-              </a:rPr>
-              <a:t>Inicio 5:10 pm</a:t>
-            </a:r>
-          </a:p>
-        </p:txBody>
-      </p:sp>
-      <p:sp>
-        <p:nvSpPr>
-          <p:cNvPr id="9" name="TextBox 8"/>
-          <p:cNvSpPr txBox="1"/>
-          <p:nvPr/>
-        </p:nvSpPr>
-        <p:spPr>
-          <a:xfrm>
             <a:off x="11094415" y="6446520"/>
             <a:ext cx="548640" cy="274320"/>
           </a:xfrm>
@@ -5139,41 +5017,6 @@
         </p:nvSpPr>
         <p:spPr>
           <a:xfrm>
-            <a:off x="2194560" y="6446520"/>
-            <a:ext cx="5943600" cy="274320"/>
-          </a:xfrm>
-          <a:prstGeom prst="rect">
-            <a:avLst/>
-          </a:prstGeom>
-          <a:noFill/>
-        </p:spPr>
-        <p:txBody>
-          <a:bodyPr wrap="square" anchor="t" lIns="0" rIns="0" tIns="0" bIns="0">
-            <a:spAutoFit/>
-          </a:bodyPr>
-          <a:lstStyle/>
-          <a:p>
-            <a:pPr algn="l"/>
-            <a:r>
-              <a:rPr sz="1000" b="1" i="0">
-                <a:solidFill>
-                  <a:srgbClr val="8F989D"/>
-                </a:solidFill>
-                <a:latin typeface="Calibri"/>
-              </a:rPr>
-              <a:t>Inicio 5:10 pm</a:t>
-            </a:r>
-          </a:p>
-        </p:txBody>
-      </p:sp>
-      <p:sp>
-        <p:nvSpPr>
-          <p:cNvPr id="11" name="TextBox 10"/>
-          <p:cNvSpPr txBox="1"/>
-          <p:nvPr/>
-        </p:nvSpPr>
-        <p:spPr>
-          <a:xfrm>
             <a:off x="11094415" y="6446520"/>
             <a:ext cx="548640" cy="274320"/>
           </a:xfrm>
@@ -5437,41 +5280,6 @@
         </p:nvSpPr>
         <p:spPr>
           <a:xfrm>
-            <a:off x="2194560" y="6446520"/>
-            <a:ext cx="5943600" cy="274320"/>
-          </a:xfrm>
-          <a:prstGeom prst="rect">
-            <a:avLst/>
-          </a:prstGeom>
-          <a:noFill/>
-        </p:spPr>
-        <p:txBody>
-          <a:bodyPr wrap="square" anchor="t" lIns="0" rIns="0" tIns="0" bIns="0">
-            <a:spAutoFit/>
-          </a:bodyPr>
-          <a:lstStyle/>
-          <a:p>
-            <a:pPr algn="l"/>
-            <a:r>
-              <a:rPr sz="1000" b="1" i="0">
-                <a:solidFill>
-                  <a:srgbClr val="8F989D"/>
-                </a:solidFill>
-                <a:latin typeface="Calibri"/>
-              </a:rPr>
-              <a:t>Inicio 5:10 pm</a:t>
-            </a:r>
-          </a:p>
-        </p:txBody>
-      </p:sp>
-      <p:sp>
-        <p:nvSpPr>
-          <p:cNvPr id="6" name="TextBox 5"/>
-          <p:cNvSpPr txBox="1"/>
-          <p:nvPr/>
-        </p:nvSpPr>
-        <p:spPr>
-          <a:xfrm>
             <a:off x="11094415" y="6446520"/>
             <a:ext cx="548640" cy="274320"/>
           </a:xfrm>
@@ -5699,41 +5507,6 @@
         </p:nvSpPr>
         <p:spPr>
           <a:xfrm>
-            <a:off x="2194560" y="6446520"/>
-            <a:ext cx="5943600" cy="274320"/>
-          </a:xfrm>
-          <a:prstGeom prst="rect">
-            <a:avLst/>
-          </a:prstGeom>
-          <a:noFill/>
-        </p:spPr>
-        <p:txBody>
-          <a:bodyPr wrap="square" anchor="t" lIns="0" rIns="0" tIns="0" bIns="0">
-            <a:spAutoFit/>
-          </a:bodyPr>
-          <a:lstStyle/>
-          <a:p>
-            <a:pPr algn="l"/>
-            <a:r>
-              <a:rPr sz="1000" b="1" i="0">
-                <a:solidFill>
-                  <a:srgbClr val="8F989D"/>
-                </a:solidFill>
-                <a:latin typeface="Calibri"/>
-              </a:rPr>
-              <a:t>Inicio 5:10 pm</a:t>
-            </a:r>
-          </a:p>
-        </p:txBody>
-      </p:sp>
-      <p:sp>
-        <p:nvSpPr>
-          <p:cNvPr id="6" name="TextBox 5"/>
-          <p:cNvSpPr txBox="1"/>
-          <p:nvPr/>
-        </p:nvSpPr>
-        <p:spPr>
-          <a:xfrm>
             <a:off x="11094415" y="6446520"/>
             <a:ext cx="548640" cy="274320"/>
           </a:xfrm>
@@ -6294,41 +6067,6 @@
         </p:nvSpPr>
         <p:spPr>
           <a:xfrm>
-            <a:off x="2194560" y="6446520"/>
-            <a:ext cx="5943600" cy="274320"/>
-          </a:xfrm>
-          <a:prstGeom prst="rect">
-            <a:avLst/>
-          </a:prstGeom>
-          <a:noFill/>
-        </p:spPr>
-        <p:txBody>
-          <a:bodyPr wrap="square" anchor="t" lIns="0" rIns="0" tIns="0" bIns="0">
-            <a:spAutoFit/>
-          </a:bodyPr>
-          <a:lstStyle/>
-          <a:p>
-            <a:pPr algn="l"/>
-            <a:r>
-              <a:rPr sz="1000" b="1" i="0">
-                <a:solidFill>
-                  <a:srgbClr val="8F989D"/>
-                </a:solidFill>
-                <a:latin typeface="Calibri"/>
-              </a:rPr>
-              <a:t>Inicio 5:10 pm</a:t>
-            </a:r>
-          </a:p>
-        </p:txBody>
-      </p:sp>
-      <p:sp>
-        <p:nvSpPr>
-          <p:cNvPr id="7" name="TextBox 6"/>
-          <p:cNvSpPr txBox="1"/>
-          <p:nvPr/>
-        </p:nvSpPr>
-        <p:spPr>
-          <a:xfrm>
             <a:off x="11094415" y="6446520"/>
             <a:ext cx="548640" cy="274320"/>
           </a:xfrm>
@@ -7434,41 +7172,6 @@
         </p:nvSpPr>
         <p:spPr>
           <a:xfrm>
-            <a:off x="2194560" y="6446520"/>
-            <a:ext cx="5943600" cy="274320"/>
-          </a:xfrm>
-          <a:prstGeom prst="rect">
-            <a:avLst/>
-          </a:prstGeom>
-          <a:noFill/>
-        </p:spPr>
-        <p:txBody>
-          <a:bodyPr wrap="square" anchor="t" lIns="0" rIns="0" tIns="0" bIns="0">
-            <a:spAutoFit/>
-          </a:bodyPr>
-          <a:lstStyle/>
-          <a:p>
-            <a:pPr algn="l"/>
-            <a:r>
-              <a:rPr sz="1000" b="1" i="0">
-                <a:solidFill>
-                  <a:srgbClr val="8F989D"/>
-                </a:solidFill>
-                <a:latin typeface="Calibri"/>
-              </a:rPr>
-              <a:t>Inicio 5:10 pm</a:t>
-            </a:r>
-          </a:p>
-        </p:txBody>
-      </p:sp>
-      <p:sp>
-        <p:nvSpPr>
-          <p:cNvPr id="26" name="TextBox 25"/>
-          <p:cNvSpPr txBox="1"/>
-          <p:nvPr/>
-        </p:nvSpPr>
-        <p:spPr>
-          <a:xfrm>
             <a:off x="11094415" y="6446520"/>
             <a:ext cx="548640" cy="274320"/>
           </a:xfrm>
@@ -7820,41 +7523,6 @@
         </p:nvSpPr>
         <p:spPr>
           <a:xfrm>
-            <a:off x="2194560" y="6446520"/>
-            <a:ext cx="5943600" cy="274320"/>
-          </a:xfrm>
-          <a:prstGeom prst="rect">
-            <a:avLst/>
-          </a:prstGeom>
-          <a:noFill/>
-        </p:spPr>
-        <p:txBody>
-          <a:bodyPr wrap="square" anchor="t" lIns="0" rIns="0" tIns="0" bIns="0">
-            <a:spAutoFit/>
-          </a:bodyPr>
-          <a:lstStyle/>
-          <a:p>
-            <a:pPr algn="l"/>
-            <a:r>
-              <a:rPr sz="1000" b="1" i="0">
-                <a:solidFill>
-                  <a:srgbClr val="8F989D"/>
-                </a:solidFill>
-                <a:latin typeface="Calibri"/>
-              </a:rPr>
-              <a:t>Inicio 5:10 pm</a:t>
-            </a:r>
-          </a:p>
-        </p:txBody>
-      </p:sp>
-      <p:sp>
-        <p:nvSpPr>
-          <p:cNvPr id="6" name="TextBox 5"/>
-          <p:cNvSpPr txBox="1"/>
-          <p:nvPr/>
-        </p:nvSpPr>
-        <p:spPr>
-          <a:xfrm>
             <a:off x="11094415" y="6446520"/>
             <a:ext cx="548640" cy="274320"/>
           </a:xfrm>
@@ -8308,41 +7976,6 @@
       <p:sp>
         <p:nvSpPr>
           <p:cNvPr id="10" name="TextBox 9"/>
-          <p:cNvSpPr txBox="1"/>
-          <p:nvPr/>
-        </p:nvSpPr>
-        <p:spPr>
-          <a:xfrm>
-            <a:off x="2194560" y="6446520"/>
-            <a:ext cx="5943600" cy="274320"/>
-          </a:xfrm>
-          <a:prstGeom prst="rect">
-            <a:avLst/>
-          </a:prstGeom>
-          <a:noFill/>
-        </p:spPr>
-        <p:txBody>
-          <a:bodyPr wrap="square" anchor="t" lIns="0" rIns="0" tIns="0" bIns="0">
-            <a:spAutoFit/>
-          </a:bodyPr>
-          <a:lstStyle/>
-          <a:p>
-            <a:pPr algn="l"/>
-            <a:r>
-              <a:rPr sz="1000" b="1" i="0">
-                <a:solidFill>
-                  <a:srgbClr val="8F989D"/>
-                </a:solidFill>
-                <a:latin typeface="Calibri"/>
-              </a:rPr>
-              <a:t>Inicio 5:10 pm</a:t>
-            </a:r>
-          </a:p>
-        </p:txBody>
-      </p:sp>
-      <p:sp>
-        <p:nvSpPr>
-          <p:cNvPr id="11" name="TextBox 10"/>
           <p:cNvSpPr txBox="1"/>
           <p:nvPr/>
         </p:nvSpPr>

--- a/Pregrado/Trabajo de grado 2/Clases/Presentacion del Curso - Trabajo de Grado 2.pptx
+++ b/Pregrado/Trabajo de grado 2/Clases/Presentacion del Curso - Trabajo de Grado 2.pptx
@@ -3773,7 +3773,7 @@
                 </a:solidFill>
                 <a:latin typeface="Calibri"/>
               </a:rPr>
-              <a:t>[URL CDigital — campus del curso pendiente]</a:t>
+              <a:t>https://cdigital.cun.edu.co/course/view.php?id=129268</a:t>
             </a:r>
           </a:p>
           <a:p>

--- a/Pregrado/Trabajo de grado 2/Clases/Presentacion del Curso - Trabajo de Grado 2.pptx
+++ b/Pregrado/Trabajo de grado 2/Clases/Presentacion del Curso - Trabajo de Grado 2.pptx
@@ -16,6 +16,7 @@
     <p:sldId id="264" r:id="rId15"/>
     <p:sldId id="265" r:id="rId16"/>
     <p:sldId id="266" r:id="rId17"/>
+    <p:sldId id="267" r:id="rId18"/>
   </p:sldIdLst>
   <p:sldSz cx="12191695" cy="6858000" type="screen4x3"/>
   <p:notesSz cx="6858000" cy="9144000"/>
@@ -3673,21 +3674,65 @@
                 </a:solidFill>
                 <a:latin typeface="Calibri"/>
               </a:rPr>
-              <a:t>RECURSOS</a:t>
-            </a:r>
-          </a:p>
-        </p:txBody>
-      </p:sp>
-      <p:sp>
-        <p:nvSpPr>
-          <p:cNvPr id="4" name="TextBox 3"/>
+              <a:t>ACUERDOS DEL CURSO</a:t>
+            </a:r>
+          </a:p>
+        </p:txBody>
+      </p:sp>
+      <p:sp>
+        <p:nvSpPr>
+          <p:cNvPr id="4" name="Rounded Rectangle 3"/>
+          <p:cNvSpPr/>
+          <p:nvPr/>
+        </p:nvSpPr>
+        <p:spPr>
+          <a:xfrm>
+            <a:off x="640080" y="1737360"/>
+            <a:ext cx="10911535" cy="969264"/>
+          </a:xfrm>
+          <a:prstGeom prst="roundRect">
+            <a:avLst/>
+          </a:prstGeom>
+          <a:solidFill>
+            <a:srgbClr val="E8F5EC"/>
+          </a:solidFill>
+          <a:ln>
+            <a:noFill/>
+          </a:ln>
+          <a:effectLst/>
+        </p:spPr>
+        <p:style>
+          <a:lnRef idx="1">
+            <a:schemeClr val="accent1"/>
+          </a:lnRef>
+          <a:fillRef idx="3">
+            <a:schemeClr val="accent1"/>
+          </a:fillRef>
+          <a:effectRef idx="2">
+            <a:schemeClr val="accent1"/>
+          </a:effectRef>
+          <a:fontRef idx="minor">
+            <a:schemeClr val="lt1"/>
+          </a:fontRef>
+        </p:style>
+        <p:txBody>
+          <a:bodyPr rtlCol="0" anchor="ctr"/>
+          <a:lstStyle/>
+          <a:p>
+            <a:pPr algn="ctr"/>
+          </a:p>
+        </p:txBody>
+      </p:sp>
+      <p:sp>
+        <p:nvSpPr>
+          <p:cNvPr id="5" name="TextBox 4"/>
           <p:cNvSpPr txBox="1"/>
           <p:nvPr/>
         </p:nvSpPr>
         <p:spPr>
           <a:xfrm>
-            <a:off x="640080" y="1691639"/>
-            <a:ext cx="10911535" cy="4617720"/>
+            <a:off x="868680" y="1847088"/>
+            <a:ext cx="10454335" cy="749808"/>
           </a:xfrm>
           <a:prstGeom prst="rect">
             <a:avLst/>
@@ -3700,300 +3745,261 @@
           </a:bodyPr>
           <a:lstStyle/>
           <a:p>
+            <a:r>
+              <a:rPr sz="1300" b="1" i="0">
+                <a:solidFill>
+                  <a:srgbClr val="0C2340"/>
+                </a:solidFill>
+                <a:latin typeface="Calibri"/>
+              </a:rPr>
+              <a:t>ℹ️ Nota institucional</a:t>
+            </a:r>
+          </a:p>
+          <a:p>
             <a:pPr>
-              <a:spcAft>
-                <a:spcPts val="1000"/>
-              </a:spcAft>
+              <a:spcBef>
+                <a:spcPts val="400"/>
+              </a:spcBef>
             </a:pPr>
             <a:r>
-              <a:rPr sz="1600" b="0" i="0">
-                <a:solidFill>
-                  <a:srgbClr val="2B2B2B"/>
-                </a:solidFill>
-                <a:latin typeface="Calibri"/>
-              </a:rPr>
-              <a:t>–   </a:t>
-            </a:r>
-            <a:r>
-              <a:rPr sz="1600" b="1" i="0">
-                <a:solidFill>
-                  <a:srgbClr val="2B2B2B"/>
-                </a:solidFill>
-                <a:latin typeface="Calibri"/>
-              </a:rPr>
-              <a:t>Contacto del Docente:</a:t>
-            </a:r>
-            <a:r>
-              <a:rPr sz="1600" b="0" i="0">
-                <a:solidFill>
-                  <a:srgbClr val="2B2B2B"/>
-                </a:solidFill>
-                <a:latin typeface="Calibri"/>
-              </a:rPr>
-              <a:t> julian_castanoe@cun.edu.co</a:t>
+              <a:rPr sz="1300" b="0" i="0">
+                <a:solidFill>
+                  <a:srgbClr val="2B2B2B"/>
+                </a:solidFill>
+                <a:latin typeface="Calibri"/>
+              </a:rPr>
+              <a:t>Encuentro sincrónico: </a:t>
+            </a:r>
+            <a:r>
+              <a:rPr sz="1300" b="1" i="0">
+                <a:solidFill>
+                  <a:srgbClr val="2B2B2B"/>
+                </a:solidFill>
+                <a:latin typeface="Calibri"/>
+              </a:rPr>
+              <a:t>Lunes, 5:00 pm – 6:00 pm</a:t>
+            </a:r>
+            <a:r>
+              <a:rPr sz="1300" b="0" i="0">
+                <a:solidFill>
+                  <a:srgbClr val="2B2B2B"/>
+                </a:solidFill>
+                <a:latin typeface="Calibri"/>
+              </a:rPr>
+              <a:t> por Google Meet. El Meet es el mismo enlace para toda la serie.</a:t>
+            </a:r>
+          </a:p>
+        </p:txBody>
+      </p:sp>
+      <p:sp>
+        <p:nvSpPr>
+          <p:cNvPr id="6" name="Rounded Rectangle 5"/>
+          <p:cNvSpPr/>
+          <p:nvPr/>
+        </p:nvSpPr>
+        <p:spPr>
+          <a:xfrm>
+            <a:off x="640080" y="2935224"/>
+            <a:ext cx="10911535" cy="969264"/>
+          </a:xfrm>
+          <a:prstGeom prst="roundRect">
+            <a:avLst/>
+          </a:prstGeom>
+          <a:solidFill>
+            <a:srgbClr val="FDECD8"/>
+          </a:solidFill>
+          <a:ln>
+            <a:noFill/>
+          </a:ln>
+          <a:effectLst/>
+        </p:spPr>
+        <p:style>
+          <a:lnRef idx="1">
+            <a:schemeClr val="accent1"/>
+          </a:lnRef>
+          <a:fillRef idx="3">
+            <a:schemeClr val="accent1"/>
+          </a:fillRef>
+          <a:effectRef idx="2">
+            <a:schemeClr val="accent1"/>
+          </a:effectRef>
+          <a:fontRef idx="minor">
+            <a:schemeClr val="lt1"/>
+          </a:fontRef>
+        </p:style>
+        <p:txBody>
+          <a:bodyPr rtlCol="0" anchor="ctr"/>
+          <a:lstStyle/>
+          <a:p>
+            <a:pPr algn="ctr"/>
+          </a:p>
+        </p:txBody>
+      </p:sp>
+      <p:sp>
+        <p:nvSpPr>
+          <p:cNvPr id="7" name="TextBox 6"/>
+          <p:cNvSpPr txBox="1"/>
+          <p:nvPr/>
+        </p:nvSpPr>
+        <p:spPr>
+          <a:xfrm>
+            <a:off x="868680" y="3044952"/>
+            <a:ext cx="10454335" cy="749808"/>
+          </a:xfrm>
+          <a:prstGeom prst="rect">
+            <a:avLst/>
+          </a:prstGeom>
+          <a:noFill/>
+        </p:spPr>
+        <p:txBody>
+          <a:bodyPr wrap="square" anchor="t" lIns="0" rIns="0" tIns="0" bIns="0">
+            <a:spAutoFit/>
+          </a:bodyPr>
+          <a:lstStyle/>
+          <a:p>
+            <a:r>
+              <a:rPr sz="1300" b="1" i="0">
+                <a:solidFill>
+                  <a:srgbClr val="0C2340"/>
+                </a:solidFill>
+                <a:latin typeface="Calibri"/>
+              </a:rPr>
+              <a:t>💡 Aclaración</a:t>
             </a:r>
           </a:p>
           <a:p>
             <a:pPr>
-              <a:spcAft>
-                <a:spcPts val="1000"/>
-              </a:spcAft>
+              <a:spcBef>
+                <a:spcPts val="400"/>
+              </a:spcBef>
             </a:pPr>
             <a:r>
-              <a:rPr sz="1600" b="0" i="0">
-                <a:solidFill>
-                  <a:srgbClr val="2B2B2B"/>
-                </a:solidFill>
-                <a:latin typeface="Calibri"/>
-              </a:rPr>
-              <a:t>–   </a:t>
-            </a:r>
-            <a:r>
-              <a:rPr sz="1600" b="1" i="0">
-                <a:solidFill>
-                  <a:srgbClr val="2B2B2B"/>
-                </a:solidFill>
-                <a:latin typeface="Calibri"/>
-              </a:rPr>
-              <a:t>CDigital (campus del curso):</a:t>
-            </a:r>
-            <a:r>
-              <a:rPr sz="1600" b="0" i="0">
-                <a:solidFill>
-                  <a:srgbClr val="2B2B2B"/>
-                </a:solidFill>
-                <a:latin typeface="Calibri"/>
-              </a:rPr>
-              <a:t> </a:t>
-            </a:r>
-            <a:r>
-              <a:rPr sz="1600" b="1" i="0">
-                <a:solidFill>
-                  <a:srgbClr val="2B2B2B"/>
-                </a:solidFill>
-                <a:latin typeface="Calibri"/>
-              </a:rPr>
-              <a:t>https://cdigital.cun.edu.co/course/view.php?id=129268</a:t>
+              <a:rPr sz="1300" b="0" i="0">
+                <a:solidFill>
+                  <a:srgbClr val="2B2B2B"/>
+                </a:solidFill>
+                <a:latin typeface="Calibri"/>
+              </a:rPr>
+              <a:t>Lunes festivo = </a:t>
+            </a:r>
+            <a:r>
+              <a:rPr sz="1300" b="1" i="0">
+                <a:solidFill>
+                  <a:srgbClr val="2B2B2B"/>
+                </a:solidFill>
+                <a:latin typeface="Calibri"/>
+              </a:rPr>
+              <a:t>clase autónoma</a:t>
+            </a:r>
+            <a:r>
+              <a:rPr sz="1300" b="0" i="0">
+                <a:solidFill>
+                  <a:srgbClr val="2B2B2B"/>
+                </a:solidFill>
+                <a:latin typeface="Calibri"/>
+              </a:rPr>
+              <a:t> (guía/actividad en el CDigital), no se pierde el hilo del proyecto.</a:t>
+            </a:r>
+          </a:p>
+        </p:txBody>
+      </p:sp>
+      <p:sp>
+        <p:nvSpPr>
+          <p:cNvPr id="8" name="Rounded Rectangle 7"/>
+          <p:cNvSpPr/>
+          <p:nvPr/>
+        </p:nvSpPr>
+        <p:spPr>
+          <a:xfrm>
+            <a:off x="640080" y="4133087"/>
+            <a:ext cx="10911535" cy="969264"/>
+          </a:xfrm>
+          <a:prstGeom prst="roundRect">
+            <a:avLst/>
+          </a:prstGeom>
+          <a:solidFill>
+            <a:srgbClr val="FBE4E4"/>
+          </a:solidFill>
+          <a:ln>
+            <a:noFill/>
+          </a:ln>
+          <a:effectLst/>
+        </p:spPr>
+        <p:style>
+          <a:lnRef idx="1">
+            <a:schemeClr val="accent1"/>
+          </a:lnRef>
+          <a:fillRef idx="3">
+            <a:schemeClr val="accent1"/>
+          </a:fillRef>
+          <a:effectRef idx="2">
+            <a:schemeClr val="accent1"/>
+          </a:effectRef>
+          <a:fontRef idx="minor">
+            <a:schemeClr val="lt1"/>
+          </a:fontRef>
+        </p:style>
+        <p:txBody>
+          <a:bodyPr rtlCol="0" anchor="ctr"/>
+          <a:lstStyle/>
+          <a:p>
+            <a:pPr algn="ctr"/>
+          </a:p>
+        </p:txBody>
+      </p:sp>
+      <p:sp>
+        <p:nvSpPr>
+          <p:cNvPr id="9" name="TextBox 8"/>
+          <p:cNvSpPr txBox="1"/>
+          <p:nvPr/>
+        </p:nvSpPr>
+        <p:spPr>
+          <a:xfrm>
+            <a:off x="868680" y="4242816"/>
+            <a:ext cx="10454335" cy="749808"/>
+          </a:xfrm>
+          <a:prstGeom prst="rect">
+            <a:avLst/>
+          </a:prstGeom>
+          <a:noFill/>
+        </p:spPr>
+        <p:txBody>
+          <a:bodyPr wrap="square" anchor="t" lIns="0" rIns="0" tIns="0" bIns="0">
+            <a:spAutoFit/>
+          </a:bodyPr>
+          <a:lstStyle/>
+          <a:p>
+            <a:r>
+              <a:rPr sz="1300" b="1" i="0">
+                <a:solidFill>
+                  <a:srgbClr val="0C2340"/>
+                </a:solidFill>
+                <a:latin typeface="Calibri"/>
+              </a:rPr>
+              <a:t>⚠️ Importante</a:t>
             </a:r>
           </a:p>
           <a:p>
             <a:pPr>
-              <a:spcAft>
-                <a:spcPts val="1000"/>
-              </a:spcAft>
+              <a:spcBef>
+                <a:spcPts val="400"/>
+              </a:spcBef>
             </a:pPr>
             <a:r>
-              <a:rPr sz="1600" b="0" i="0">
-                <a:solidFill>
-                  <a:srgbClr val="2B2B2B"/>
-                </a:solidFill>
-                <a:latin typeface="Calibri"/>
-              </a:rPr>
-              <a:t>–   </a:t>
-            </a:r>
-            <a:r>
-              <a:rPr sz="1600" b="1" i="0">
-                <a:solidFill>
-                  <a:srgbClr val="2B2B2B"/>
-                </a:solidFill>
-                <a:latin typeface="Calibri"/>
-              </a:rPr>
-              <a:t>Google Meet (mismo enlace toda la serie):</a:t>
-            </a:r>
-            <a:r>
-              <a:rPr sz="1600" b="0" i="0">
-                <a:solidFill>
-                  <a:srgbClr val="2B2B2B"/>
-                </a:solidFill>
-                <a:latin typeface="Calibri"/>
-              </a:rPr>
-              <a:t> </a:t>
-            </a:r>
-            <a:r>
-              <a:rPr sz="1600" b="1" i="0">
-                <a:solidFill>
-                  <a:srgbClr val="2B2B2B"/>
-                </a:solidFill>
-                <a:latin typeface="Calibri"/>
-              </a:rPr>
-              <a:t>[URL Meet — mismo enlace toda la serie · Trabajo de Grado 2]</a:t>
-            </a:r>
-          </a:p>
-          <a:p>
-            <a:pPr>
-              <a:spcAft>
-                <a:spcPts val="1000"/>
-              </a:spcAft>
-            </a:pPr>
-            <a:r>
-              <a:rPr sz="1600" b="0" i="0">
-                <a:solidFill>
-                  <a:srgbClr val="2B2B2B"/>
-                </a:solidFill>
-                <a:latin typeface="Calibri"/>
-              </a:rPr>
-              <a:t>–   </a:t>
-            </a:r>
-            <a:r>
-              <a:rPr sz="1600" b="1" i="0">
-                <a:solidFill>
-                  <a:srgbClr val="2B2B2B"/>
-                </a:solidFill>
-                <a:latin typeface="Calibri"/>
-              </a:rPr>
-              <a:t>Plantilla APA CUN – Proyecto de Grado</a:t>
-            </a:r>
-            <a:r>
-              <a:rPr sz="1600" b="0" i="0">
-                <a:solidFill>
-                  <a:srgbClr val="2B2B2B"/>
-                </a:solidFill>
-                <a:latin typeface="Calibri"/>
-              </a:rPr>
-              <a:t> (viene en tu carpeta del curso): `Recursos/Plantilla_APA_CUN_Proyecto de grado.docx`.</a:t>
-            </a:r>
-          </a:p>
-          <a:p>
-            <a:pPr>
-              <a:spcAft>
-                <a:spcPts val="1000"/>
-              </a:spcAft>
-            </a:pPr>
-            <a:r>
-              <a:rPr sz="1600" b="0" i="0">
-                <a:solidFill>
-                  <a:srgbClr val="2B2B2B"/>
-                </a:solidFill>
-                <a:latin typeface="Calibri"/>
-              </a:rPr>
-              <a:t>–   </a:t>
-            </a:r>
-            <a:r>
-              <a:rPr sz="1600" b="1" i="0">
-                <a:solidFill>
-                  <a:srgbClr val="2B2B2B"/>
-                </a:solidFill>
-                <a:latin typeface="Calibri"/>
-              </a:rPr>
-              <a:t>Plantilla APA CUN (en tu carpeta):</a:t>
-            </a:r>
-            <a:r>
-              <a:rPr sz="1600" b="0" i="0">
-                <a:solidFill>
-                  <a:srgbClr val="2B2B2B"/>
-                </a:solidFill>
-                <a:latin typeface="Calibri"/>
-              </a:rPr>
-              <a:t> `Recursos/Plantilla_APA_CUN_Proyecto de grado.docx`</a:t>
-            </a:r>
-          </a:p>
-          <a:p>
-            <a:pPr>
-              <a:spcAft>
-                <a:spcPts val="1000"/>
-              </a:spcAft>
-            </a:pPr>
-            <a:r>
-              <a:rPr sz="1600" b="0" i="0">
-                <a:solidFill>
-                  <a:srgbClr val="2B2B2B"/>
-                </a:solidFill>
-                <a:latin typeface="Calibri"/>
-              </a:rPr>
-              <a:t>–   </a:t>
-            </a:r>
-            <a:r>
-              <a:rPr sz="1600" b="1" i="0">
-                <a:solidFill>
-                  <a:srgbClr val="2B2B2B"/>
-                </a:solidFill>
-                <a:latin typeface="Calibri"/>
-              </a:rPr>
-              <a:t>Enunciados ACA / cortes (estudiantes):</a:t>
-            </a:r>
-            <a:r>
-              <a:rPr sz="1600" b="0" i="0">
-                <a:solidFill>
-                  <a:srgbClr val="2B2B2B"/>
-                </a:solidFill>
-                <a:latin typeface="Calibri"/>
-              </a:rPr>
-              <a:t> `Clases/Recursos/ACAs/`.</a:t>
-            </a:r>
-          </a:p>
-          <a:p>
-            <a:pPr>
-              <a:spcAft>
-                <a:spcPts val="1000"/>
-              </a:spcAft>
-            </a:pPr>
-            <a:r>
-              <a:rPr sz="1600" b="0" i="0">
-                <a:solidFill>
-                  <a:srgbClr val="2B2B2B"/>
-                </a:solidFill>
-                <a:latin typeface="Calibri"/>
-              </a:rPr>
-              <a:t>–   </a:t>
-            </a:r>
-            <a:r>
-              <a:rPr sz="1600" b="1" i="0">
-                <a:solidFill>
-                  <a:srgbClr val="2B2B2B"/>
-                </a:solidFill>
-                <a:latin typeface="Calibri"/>
-              </a:rPr>
-              <a:t>Siguiente eslabón:</a:t>
-            </a:r>
-            <a:r>
-              <a:rPr sz="1600" b="0" i="0">
-                <a:solidFill>
-                  <a:srgbClr val="2B2B2B"/>
-                </a:solidFill>
-                <a:latin typeface="Calibri"/>
-              </a:rPr>
-              <a:t> Trabajo de Grado 3 (sustentación ante jurados + repositorio).</a:t>
-            </a:r>
-          </a:p>
-          <a:p>
-            <a:pPr>
-              <a:spcAft>
-                <a:spcPts val="1000"/>
-              </a:spcAft>
-            </a:pPr>
-            <a:r>
-              <a:rPr sz="1600" b="0" i="0">
-                <a:solidFill>
-                  <a:srgbClr val="2B2B2B"/>
-                </a:solidFill>
-                <a:latin typeface="Calibri"/>
-              </a:rPr>
-              <a:t>–   </a:t>
-            </a:r>
-            <a:r>
-              <a:rPr sz="1600" b="1" i="0">
-                <a:solidFill>
-                  <a:srgbClr val="2B2B2B"/>
-                </a:solidFill>
-                <a:latin typeface="Calibri"/>
-              </a:rPr>
-              <a:t>Entregas y notas oficiales:</a:t>
-            </a:r>
-            <a:r>
-              <a:rPr sz="1600" b="0" i="0">
-                <a:solidFill>
-                  <a:srgbClr val="2B2B2B"/>
-                </a:solidFill>
-                <a:latin typeface="Calibri"/>
-              </a:rPr>
-              <a:t> solo por CDigital del curso.</a:t>
-            </a:r>
-          </a:p>
-        </p:txBody>
-      </p:sp>
-      <p:sp>
-        <p:nvSpPr>
-          <p:cNvPr id="5" name="TextBox 4"/>
+              <a:rPr sz="1300" b="0" i="0">
+                <a:solidFill>
+                  <a:srgbClr val="2B2B2B"/>
+                </a:solidFill>
+                <a:latin typeface="Calibri"/>
+              </a:rPr>
+              <a:t>Hasta cargar el Syllabus SIAC, cualquier detalle de rubrica/pesos se verifica en el aula virtual.</a:t>
+            </a:r>
+          </a:p>
+        </p:txBody>
+      </p:sp>
+      <p:sp>
+        <p:nvSpPr>
+          <p:cNvPr id="10" name="TextBox 9"/>
           <p:cNvSpPr txBox="1"/>
           <p:nvPr/>
         </p:nvSpPr>
@@ -4061,6 +4067,459 @@
         <p:spPr>
           <a:xfrm>
             <a:off x="0" y="0"/>
+            <a:ext cx="12191695" cy="1188720"/>
+          </a:xfrm>
+          <a:prstGeom prst="rect">
+            <a:avLst/>
+          </a:prstGeom>
+          <a:solidFill>
+            <a:srgbClr val="0C2340"/>
+          </a:solidFill>
+          <a:ln>
+            <a:noFill/>
+          </a:ln>
+          <a:effectLst/>
+        </p:spPr>
+        <p:style>
+          <a:lnRef idx="1">
+            <a:schemeClr val="accent1"/>
+          </a:lnRef>
+          <a:fillRef idx="3">
+            <a:schemeClr val="accent1"/>
+          </a:fillRef>
+          <a:effectRef idx="2">
+            <a:schemeClr val="accent1"/>
+          </a:effectRef>
+          <a:fontRef idx="minor">
+            <a:schemeClr val="lt1"/>
+          </a:fontRef>
+        </p:style>
+        <p:txBody>
+          <a:bodyPr rtlCol="0" anchor="ctr"/>
+          <a:lstStyle/>
+          <a:p>
+            <a:pPr algn="ctr"/>
+          </a:p>
+        </p:txBody>
+      </p:sp>
+      <p:sp>
+        <p:nvSpPr>
+          <p:cNvPr id="3" name="TextBox 2"/>
+          <p:cNvSpPr txBox="1"/>
+          <p:nvPr/>
+        </p:nvSpPr>
+        <p:spPr>
+          <a:xfrm>
+            <a:off x="640080" y="0"/>
+            <a:ext cx="9082735" cy="1188720"/>
+          </a:xfrm>
+          <a:prstGeom prst="rect">
+            <a:avLst/>
+          </a:prstGeom>
+          <a:noFill/>
+        </p:spPr>
+        <p:txBody>
+          <a:bodyPr wrap="square" anchor="ctr" lIns="0" rIns="0" tIns="0" bIns="0">
+            <a:spAutoFit/>
+          </a:bodyPr>
+          <a:lstStyle/>
+          <a:p>
+            <a:pPr algn="ctr"/>
+            <a:r>
+              <a:rPr sz="2600" b="1" i="0">
+                <a:solidFill>
+                  <a:srgbClr val="FFFFFF"/>
+                </a:solidFill>
+                <a:latin typeface="Calibri"/>
+              </a:rPr>
+              <a:t>RECURSOS</a:t>
+            </a:r>
+          </a:p>
+        </p:txBody>
+      </p:sp>
+      <p:sp>
+        <p:nvSpPr>
+          <p:cNvPr id="4" name="TextBox 3"/>
+          <p:cNvSpPr txBox="1"/>
+          <p:nvPr/>
+        </p:nvSpPr>
+        <p:spPr>
+          <a:xfrm>
+            <a:off x="640080" y="1691639"/>
+            <a:ext cx="10911535" cy="4617720"/>
+          </a:xfrm>
+          <a:prstGeom prst="rect">
+            <a:avLst/>
+          </a:prstGeom>
+          <a:noFill/>
+        </p:spPr>
+        <p:txBody>
+          <a:bodyPr wrap="square" anchor="t" lIns="0" rIns="0" tIns="0" bIns="0">
+            <a:spAutoFit/>
+          </a:bodyPr>
+          <a:lstStyle/>
+          <a:p>
+            <a:pPr>
+              <a:spcAft>
+                <a:spcPts val="1000"/>
+              </a:spcAft>
+            </a:pPr>
+            <a:r>
+              <a:rPr sz="1600" b="0" i="0">
+                <a:solidFill>
+                  <a:srgbClr val="2B2B2B"/>
+                </a:solidFill>
+                <a:latin typeface="Calibri"/>
+              </a:rPr>
+              <a:t>–   </a:t>
+            </a:r>
+            <a:r>
+              <a:rPr sz="1600" b="1" i="0">
+                <a:solidFill>
+                  <a:srgbClr val="2B2B2B"/>
+                </a:solidFill>
+                <a:latin typeface="Calibri"/>
+              </a:rPr>
+              <a:t>Contacto del Docente:</a:t>
+            </a:r>
+            <a:r>
+              <a:rPr sz="1600" b="0" i="0">
+                <a:solidFill>
+                  <a:srgbClr val="2B2B2B"/>
+                </a:solidFill>
+                <a:latin typeface="Calibri"/>
+              </a:rPr>
+              <a:t> julian_castanoe@cun.edu.co</a:t>
+            </a:r>
+          </a:p>
+          <a:p>
+            <a:pPr>
+              <a:spcAft>
+                <a:spcPts val="1000"/>
+              </a:spcAft>
+            </a:pPr>
+            <a:r>
+              <a:rPr sz="1600" b="0" i="0">
+                <a:solidFill>
+                  <a:srgbClr val="2B2B2B"/>
+                </a:solidFill>
+                <a:latin typeface="Calibri"/>
+              </a:rPr>
+              <a:t>–   </a:t>
+            </a:r>
+            <a:r>
+              <a:rPr sz="1600" b="1" i="0">
+                <a:solidFill>
+                  <a:srgbClr val="2B2B2B"/>
+                </a:solidFill>
+                <a:latin typeface="Calibri"/>
+              </a:rPr>
+              <a:t>CDigital (campus del curso):</a:t>
+            </a:r>
+            <a:r>
+              <a:rPr sz="1600" b="0" i="0">
+                <a:solidFill>
+                  <a:srgbClr val="2B2B2B"/>
+                </a:solidFill>
+                <a:latin typeface="Calibri"/>
+              </a:rPr>
+              <a:t> </a:t>
+            </a:r>
+            <a:r>
+              <a:rPr sz="1600" b="1" i="0">
+                <a:solidFill>
+                  <a:srgbClr val="2B2B2B"/>
+                </a:solidFill>
+                <a:latin typeface="Calibri"/>
+              </a:rPr>
+              <a:t>https://cdigital.cun.edu.co/course/view.php?id=129268</a:t>
+            </a:r>
+          </a:p>
+          <a:p>
+            <a:pPr>
+              <a:spcAft>
+                <a:spcPts val="1000"/>
+              </a:spcAft>
+            </a:pPr>
+            <a:r>
+              <a:rPr sz="1600" b="0" i="0">
+                <a:solidFill>
+                  <a:srgbClr val="2B2B2B"/>
+                </a:solidFill>
+                <a:latin typeface="Calibri"/>
+              </a:rPr>
+              <a:t>–   </a:t>
+            </a:r>
+            <a:r>
+              <a:rPr sz="1600" b="1" i="0">
+                <a:solidFill>
+                  <a:srgbClr val="2B2B2B"/>
+                </a:solidFill>
+                <a:latin typeface="Calibri"/>
+              </a:rPr>
+              <a:t>Google Meet (mismo enlace toda la serie):</a:t>
+            </a:r>
+            <a:r>
+              <a:rPr sz="1600" b="0" i="0">
+                <a:solidFill>
+                  <a:srgbClr val="2B2B2B"/>
+                </a:solidFill>
+                <a:latin typeface="Calibri"/>
+              </a:rPr>
+              <a:t> </a:t>
+            </a:r>
+            <a:r>
+              <a:rPr sz="1600" b="1" i="0">
+                <a:solidFill>
+                  <a:srgbClr val="2B2B2B"/>
+                </a:solidFill>
+                <a:latin typeface="Calibri"/>
+              </a:rPr>
+              <a:t>[URL Meet — mismo enlace toda la serie · Trabajo de Grado 2]</a:t>
+            </a:r>
+          </a:p>
+          <a:p>
+            <a:pPr>
+              <a:spcAft>
+                <a:spcPts val="1000"/>
+              </a:spcAft>
+            </a:pPr>
+            <a:r>
+              <a:rPr sz="1600" b="0" i="0">
+                <a:solidFill>
+                  <a:srgbClr val="2B2B2B"/>
+                </a:solidFill>
+                <a:latin typeface="Calibri"/>
+              </a:rPr>
+              <a:t>–   </a:t>
+            </a:r>
+            <a:r>
+              <a:rPr sz="1600" b="1" i="0">
+                <a:solidFill>
+                  <a:srgbClr val="2B2B2B"/>
+                </a:solidFill>
+                <a:latin typeface="Calibri"/>
+              </a:rPr>
+              <a:t>Plantilla APA CUN – Proyecto de Grado</a:t>
+            </a:r>
+            <a:r>
+              <a:rPr sz="1600" b="0" i="0">
+                <a:solidFill>
+                  <a:srgbClr val="2B2B2B"/>
+                </a:solidFill>
+                <a:latin typeface="Calibri"/>
+              </a:rPr>
+              <a:t> (viene en tu carpeta del curso): `Recursos/Plantilla_APA_CUN_Proyecto de grado.docx`.</a:t>
+            </a:r>
+          </a:p>
+          <a:p>
+            <a:pPr>
+              <a:spcAft>
+                <a:spcPts val="1000"/>
+              </a:spcAft>
+            </a:pPr>
+            <a:r>
+              <a:rPr sz="1600" b="0" i="0">
+                <a:solidFill>
+                  <a:srgbClr val="2B2B2B"/>
+                </a:solidFill>
+                <a:latin typeface="Calibri"/>
+              </a:rPr>
+              <a:t>–   </a:t>
+            </a:r>
+            <a:r>
+              <a:rPr sz="1600" b="1" i="0">
+                <a:solidFill>
+                  <a:srgbClr val="2B2B2B"/>
+                </a:solidFill>
+                <a:latin typeface="Calibri"/>
+              </a:rPr>
+              <a:t>Plantilla APA CUN (en tu carpeta):</a:t>
+            </a:r>
+            <a:r>
+              <a:rPr sz="1600" b="0" i="0">
+                <a:solidFill>
+                  <a:srgbClr val="2B2B2B"/>
+                </a:solidFill>
+                <a:latin typeface="Calibri"/>
+              </a:rPr>
+              <a:t> `Recursos/Plantilla_APA_CUN_Proyecto de grado.docx`</a:t>
+            </a:r>
+          </a:p>
+          <a:p>
+            <a:pPr>
+              <a:spcAft>
+                <a:spcPts val="1000"/>
+              </a:spcAft>
+            </a:pPr>
+            <a:r>
+              <a:rPr sz="1600" b="0" i="0">
+                <a:solidFill>
+                  <a:srgbClr val="2B2B2B"/>
+                </a:solidFill>
+                <a:latin typeface="Calibri"/>
+              </a:rPr>
+              <a:t>–   </a:t>
+            </a:r>
+            <a:r>
+              <a:rPr sz="1600" b="1" i="0">
+                <a:solidFill>
+                  <a:srgbClr val="2B2B2B"/>
+                </a:solidFill>
+                <a:latin typeface="Calibri"/>
+              </a:rPr>
+              <a:t>Enunciados ACA / cortes (estudiantes):</a:t>
+            </a:r>
+            <a:r>
+              <a:rPr sz="1600" b="0" i="0">
+                <a:solidFill>
+                  <a:srgbClr val="2B2B2B"/>
+                </a:solidFill>
+                <a:latin typeface="Calibri"/>
+              </a:rPr>
+              <a:t> `Clases/Recursos/ACAs/`.</a:t>
+            </a:r>
+          </a:p>
+          <a:p>
+            <a:pPr>
+              <a:spcAft>
+                <a:spcPts val="1000"/>
+              </a:spcAft>
+            </a:pPr>
+            <a:r>
+              <a:rPr sz="1600" b="0" i="0">
+                <a:solidFill>
+                  <a:srgbClr val="2B2B2B"/>
+                </a:solidFill>
+                <a:latin typeface="Calibri"/>
+              </a:rPr>
+              <a:t>–   </a:t>
+            </a:r>
+            <a:r>
+              <a:rPr sz="1600" b="1" i="0">
+                <a:solidFill>
+                  <a:srgbClr val="2B2B2B"/>
+                </a:solidFill>
+                <a:latin typeface="Calibri"/>
+              </a:rPr>
+              <a:t>Siguiente eslabón:</a:t>
+            </a:r>
+            <a:r>
+              <a:rPr sz="1600" b="0" i="0">
+                <a:solidFill>
+                  <a:srgbClr val="2B2B2B"/>
+                </a:solidFill>
+                <a:latin typeface="Calibri"/>
+              </a:rPr>
+              <a:t> Trabajo de Grado 3 (sustentación ante jurados + repositorio).</a:t>
+            </a:r>
+          </a:p>
+          <a:p>
+            <a:pPr>
+              <a:spcAft>
+                <a:spcPts val="1000"/>
+              </a:spcAft>
+            </a:pPr>
+            <a:r>
+              <a:rPr sz="1600" b="0" i="0">
+                <a:solidFill>
+                  <a:srgbClr val="2B2B2B"/>
+                </a:solidFill>
+                <a:latin typeface="Calibri"/>
+              </a:rPr>
+              <a:t>–   </a:t>
+            </a:r>
+            <a:r>
+              <a:rPr sz="1600" b="1" i="0">
+                <a:solidFill>
+                  <a:srgbClr val="2B2B2B"/>
+                </a:solidFill>
+                <a:latin typeface="Calibri"/>
+              </a:rPr>
+              <a:t>Entregas y notas oficiales:</a:t>
+            </a:r>
+            <a:r>
+              <a:rPr sz="1600" b="0" i="0">
+                <a:solidFill>
+                  <a:srgbClr val="2B2B2B"/>
+                </a:solidFill>
+                <a:latin typeface="Calibri"/>
+              </a:rPr>
+              <a:t> solo por CDigital del curso.</a:t>
+            </a:r>
+          </a:p>
+        </p:txBody>
+      </p:sp>
+      <p:sp>
+        <p:nvSpPr>
+          <p:cNvPr id="5" name="TextBox 4"/>
+          <p:cNvSpPr txBox="1"/>
+          <p:nvPr/>
+        </p:nvSpPr>
+        <p:spPr>
+          <a:xfrm>
+            <a:off x="11094415" y="6446520"/>
+            <a:ext cx="548640" cy="274320"/>
+          </a:xfrm>
+          <a:prstGeom prst="rect">
+            <a:avLst/>
+          </a:prstGeom>
+          <a:noFill/>
+        </p:spPr>
+        <p:txBody>
+          <a:bodyPr wrap="square" anchor="t" lIns="0" rIns="0" tIns="0" bIns="0">
+            <a:spAutoFit/>
+          </a:bodyPr>
+          <a:lstStyle/>
+          <a:p>
+            <a:pPr algn="r"/>
+            <a:r>
+              <a:rPr sz="1000" b="1" i="0">
+                <a:solidFill>
+                  <a:srgbClr val="8F989D"/>
+                </a:solidFill>
+                <a:latin typeface="Calibri"/>
+              </a:rPr>
+              <a:t>11</a:t>
+            </a:r>
+          </a:p>
+        </p:txBody>
+      </p:sp>
+    </p:spTree>
+  </p:cSld>
+  <p:clrMapOvr>
+    <a:masterClrMapping/>
+  </p:clrMapOvr>
+</p:sld>
+</file>
+
+<file path=ppt/slides/slide12.xml><?xml version="1.0" encoding="utf-8"?>
+<p:sld xmlns:a="http://schemas.openxmlformats.org/drawingml/2006/main" xmlns:p="http://schemas.openxmlformats.org/presentationml/2006/main" xmlns:r="http://schemas.openxmlformats.org/officeDocument/2006/relationships">
+  <p:cSld>
+    <p:bg>
+      <p:bgPr>
+        <a:solidFill>
+          <a:srgbClr val="FFFFFF"/>
+        </a:solidFill>
+        <a:effectLst/>
+      </p:bgPr>
+    </p:bg>
+    <p:spTree>
+      <p:nvGrpSpPr>
+        <p:cNvPr id="1" name=""/>
+        <p:cNvGrpSpPr/>
+        <p:nvPr/>
+      </p:nvGrpSpPr>
+      <p:grpSpPr/>
+      <p:sp>
+        <p:nvSpPr>
+          <p:cNvPr id="2" name="Rectangle 1"/>
+          <p:cNvSpPr/>
+          <p:nvPr/>
+        </p:nvSpPr>
+        <p:spPr>
+          <a:xfrm>
+            <a:off x="0" y="0"/>
             <a:ext cx="12191695" cy="164592"/>
           </a:xfrm>
           <a:prstGeom prst="rect">
@@ -6194,7 +6653,7 @@
                 </a:solidFill>
                 <a:latin typeface="Calibri"/>
               </a:rPr>
-              <a:t>EVALUACIÓN (ART. 52) — ORIENTATIVA</a:t>
+              <a:t>EVALUACIÓN — CORTES (ART. 52)</a:t>
             </a:r>
           </a:p>
         </p:txBody>
@@ -6335,7 +6794,7 @@
                 </a:solidFill>
                 <a:latin typeface="Calibri"/>
               </a:rPr>
-              <a:t>Corte 1  ·  30%*</a:t>
+              <a:t>Corte 1  ·  30%</a:t>
             </a:r>
           </a:p>
         </p:txBody>
@@ -6430,7 +6889,7 @@
                 </a:solidFill>
                 <a:latin typeface="Calibri"/>
               </a:rPr>
-              <a:t>10/08/2026</a:t>
+              <a:t>24/08/2026</a:t>
             </a:r>
           </a:p>
         </p:txBody>
@@ -6525,7 +6984,7 @@
                 </a:solidFill>
                 <a:latin typeface="Calibri"/>
               </a:rPr>
-              <a:t>07/09/2026</a:t>
+              <a:t>14/09/2026</a:t>
             </a:r>
           </a:p>
         </p:txBody>
@@ -6604,7 +7063,7 @@
                 </a:solidFill>
                 <a:latin typeface="Calibri"/>
               </a:rPr>
-              <a:t>Corte 2  ·  30%*</a:t>
+              <a:t>Corte 2  ·  30%</a:t>
             </a:r>
           </a:p>
         </p:txBody>
@@ -6699,7 +7158,7 @@
                 </a:solidFill>
                 <a:latin typeface="Calibri"/>
               </a:rPr>
-              <a:t>14/09/2026</a:t>
+              <a:t>21/09/2026</a:t>
             </a:r>
           </a:p>
         </p:txBody>
@@ -6873,7 +7332,7 @@
                 </a:solidFill>
                 <a:latin typeface="Calibri"/>
               </a:rPr>
-              <a:t>Corte 3  ·  40%*</a:t>
+              <a:t>Corte 3  ·  40%</a:t>
             </a:r>
           </a:p>
         </p:txBody>
@@ -6968,7 +7427,7 @@
                 </a:solidFill>
                 <a:latin typeface="Calibri"/>
               </a:rPr>
-              <a:t>12/10/2026</a:t>
+              <a:t>06/10/2026</a:t>
             </a:r>
           </a:p>
         </p:txBody>
@@ -7063,7 +7522,7 @@
                 </a:solidFill>
                 <a:latin typeface="Calibri"/>
               </a:rPr>
-              <a:t>09/11/2026</a:t>
+              <a:t>22/11/2026</a:t>
             </a:r>
           </a:p>
         </p:txBody>
@@ -7141,7 +7600,79 @@
                 </a:solidFill>
                 <a:latin typeface="Calibri"/>
               </a:rPr>
-              <a:t>*Pesos típicos Art. 52 (30/30/40). CONFIRMAR en Syllabus/CDigital. Enunciados: Clases/Recursos/ACAs/. Fechas = día de clase (lun). Recepción máx.: </a:t>
+              <a:t>Corte 1 30% = Quiz 1 6% + Parcial 1 24% · Corte 2 30% = Quiz 2 9% + Parcial 2 21% · Corte 3 40% = ACA Final 32,8% + Quiz 3 4% + Autoevaluación 1,6% + Coevaluación 1,6% — libro de calificaciones de </a:t>
+            </a:r>
+            <a:r>
+              <a:rPr sz="1200" b="1" i="0">
+                <a:solidFill>
+                  <a:srgbClr val="2B2B2B"/>
+                </a:solidFill>
+                <a:latin typeface="Calibri"/>
+              </a:rPr>
+              <a:t>CDigital</a:t>
+            </a:r>
+            <a:r>
+              <a:rPr sz="1200" b="0" i="0">
+                <a:solidFill>
+                  <a:srgbClr val="2B2B2B"/>
+                </a:solidFill>
+                <a:latin typeface="Calibri"/>
+              </a:rPr>
+              <a:t>. Quices y parciales: </a:t>
+            </a:r>
+            <a:r>
+              <a:rPr sz="1200" b="1" i="0">
+                <a:solidFill>
+                  <a:srgbClr val="2B2B2B"/>
+                </a:solidFill>
+                <a:latin typeface="Calibri"/>
+              </a:rPr>
+              <a:t>cuestionarios</a:t>
+            </a:r>
+            <a:r>
+              <a:rPr sz="1200" b="0" i="0">
+                <a:solidFill>
+                  <a:srgbClr val="2B2B2B"/>
+                </a:solidFill>
+                <a:latin typeface="Calibri"/>
+              </a:rPr>
+              <a:t> que cierran en día de clase (lun). </a:t>
+            </a:r>
+            <a:r>
+              <a:rPr sz="1200" b="1" i="0">
+                <a:solidFill>
+                  <a:srgbClr val="2B2B2B"/>
+                </a:solidFill>
+                <a:latin typeface="Calibri"/>
+              </a:rPr>
+              <a:t>ACA Final</a:t>
+            </a:r>
+            <a:r>
+              <a:rPr sz="1200" b="0" i="0">
+                <a:solidFill>
+                  <a:srgbClr val="2B2B2B"/>
+                </a:solidFill>
+                <a:latin typeface="Calibri"/>
+              </a:rPr>
+              <a:t> (tarea/documento) cierra </a:t>
+            </a:r>
+            <a:r>
+              <a:rPr sz="1200" b="1" i="0">
+                <a:solidFill>
+                  <a:srgbClr val="2B2B2B"/>
+                </a:solidFill>
+                <a:latin typeface="Calibri"/>
+              </a:rPr>
+              <a:t>14/11/2026</a:t>
+            </a:r>
+            <a:r>
+              <a:rPr sz="1200" b="0" i="0">
+                <a:solidFill>
+                  <a:srgbClr val="2B2B2B"/>
+                </a:solidFill>
+                <a:latin typeface="Calibri"/>
+              </a:rPr>
+              <a:t>. Enunciados: Clases/Recursos/ACAs/. Recepción máx. de trabajos: </a:t>
             </a:r>
             <a:r>
               <a:rPr sz="1200" b="1" i="0">
@@ -7299,7 +7830,7 @@
                 </a:solidFill>
                 <a:latin typeface="Calibri"/>
               </a:rPr>
-              <a:t>ALCANCE DE LA EVALUACIÓN</a:t>
+              <a:t>CÓMO SE CALIFICA — LOS ÍTEMS DEL AULA (CDIGITAL)</a:t>
             </a:r>
           </a:p>
         </p:txBody>
@@ -7312,8 +7843,8 @@
         </p:nvSpPr>
         <p:spPr>
           <a:xfrm>
-            <a:off x="640080" y="1691639"/>
-            <a:ext cx="10911535" cy="4617720"/>
+            <a:off x="640080" y="1280160"/>
+            <a:ext cx="10911535" cy="411480"/>
           </a:xfrm>
           <a:prstGeom prst="rect">
             <a:avLst/>
@@ -7326,198 +7857,1122 @@
           </a:bodyPr>
           <a:lstStyle/>
           <a:p>
-            <a:pPr>
-              <a:spcAft>
-                <a:spcPts val="1000"/>
-              </a:spcAft>
-            </a:pPr>
-            <a:r>
-              <a:rPr sz="1300" b="0" i="0">
-                <a:solidFill>
-                  <a:srgbClr val="2B2B2B"/>
-                </a:solidFill>
-                <a:latin typeface="Calibri"/>
-              </a:rPr>
-              <a:t>–   </a:t>
-            </a:r>
-            <a:r>
-              <a:rPr sz="1300" b="1" i="0">
-                <a:solidFill>
-                  <a:srgbClr val="2B2B2B"/>
-                </a:solidFill>
-                <a:latin typeface="Calibri"/>
-              </a:rPr>
-              <a:t>Régimen:</a:t>
-            </a:r>
-            <a:r>
-              <a:rPr sz="1300" b="0" i="0">
-                <a:solidFill>
-                  <a:srgbClr val="2B2B2B"/>
-                </a:solidFill>
-                <a:latin typeface="Calibri"/>
-              </a:rPr>
-              <a:t> Art. 52 · pesos orientativos </a:t>
-            </a:r>
-            <a:r>
-              <a:rPr sz="1300" b="1" i="0">
-                <a:solidFill>
-                  <a:srgbClr val="2B2B2B"/>
-                </a:solidFill>
-                <a:latin typeface="Calibri"/>
-              </a:rPr>
-              <a:t>30% / 30% / 40%</a:t>
-            </a:r>
-            <a:r>
-              <a:rPr sz="1300" b="0" i="0">
-                <a:solidFill>
-                  <a:srgbClr val="2B2B2B"/>
-                </a:solidFill>
-                <a:latin typeface="Calibri"/>
-              </a:rPr>
-              <a:t> hasta cargar Syllabus SIAC de TG2 (confirmar en CDigital).</a:t>
-            </a:r>
-          </a:p>
-          <a:p>
-            <a:pPr>
-              <a:spcAft>
-                <a:spcPts val="1000"/>
-              </a:spcAft>
-            </a:pPr>
-            <a:r>
-              <a:rPr sz="1300" b="0" i="0">
-                <a:solidFill>
-                  <a:srgbClr val="2B2B2B"/>
-                </a:solidFill>
-                <a:latin typeface="Calibri"/>
-              </a:rPr>
-              <a:t>–   Autoevaluación y coevaluación </a:t>
-            </a:r>
-            <a:r>
-              <a:rPr sz="1300" b="1" i="0">
-                <a:solidFill>
-                  <a:srgbClr val="2B2B2B"/>
-                </a:solidFill>
-                <a:latin typeface="Calibri"/>
-              </a:rPr>
-              <a:t>con porcentaje propio</a:t>
-            </a:r>
-            <a:r>
-              <a:rPr sz="1300" b="0" i="0">
-                <a:solidFill>
-                  <a:srgbClr val="2B2B2B"/>
-                </a:solidFill>
-                <a:latin typeface="Calibri"/>
-              </a:rPr>
-              <a:t> (modelo AFI Proyecto I: 4% + 4% según ESP329): </a:t>
-            </a:r>
-            <a:r>
-              <a:rPr sz="1300" b="1" i="0">
-                <a:solidFill>
-                  <a:srgbClr val="2B2B2B"/>
-                </a:solidFill>
-                <a:latin typeface="Calibri"/>
-              </a:rPr>
-              <a:t>no aplican</a:t>
-            </a:r>
-            <a:r>
-              <a:rPr sz="1300" b="0" i="0">
-                <a:solidFill>
-                  <a:srgbClr val="2B2B2B"/>
-                </a:solidFill>
-                <a:latin typeface="Calibri"/>
-              </a:rPr>
-              <a:t> en esta asignatura según el syllabus SIAC / Art. 52.</a:t>
-            </a:r>
-          </a:p>
-          <a:p>
-            <a:pPr>
-              <a:spcAft>
-                <a:spcPts val="1000"/>
-              </a:spcAft>
-            </a:pPr>
-            <a:r>
-              <a:rPr sz="1300" b="0" i="0">
-                <a:solidFill>
-                  <a:srgbClr val="2B2B2B"/>
-                </a:solidFill>
-                <a:latin typeface="Calibri"/>
-              </a:rPr>
-              <a:t>–   No confundir con la autoevaluación </a:t>
-            </a:r>
-            <a:r>
-              <a:rPr sz="1300" b="1" i="0">
-                <a:solidFill>
-                  <a:srgbClr val="2B2B2B"/>
-                </a:solidFill>
-                <a:latin typeface="Calibri"/>
-              </a:rPr>
-              <a:t>institucional</a:t>
-            </a:r>
-            <a:r>
-              <a:rPr sz="1300" b="0" i="0">
-                <a:solidFill>
-                  <a:srgbClr val="2B2B2B"/>
-                </a:solidFill>
-                <a:latin typeface="Calibri"/>
-              </a:rPr>
-              <a:t> SIAC (calidad de programas en acreditacion.cun.edu.co): esa no es una nota del curso.</a:t>
-            </a:r>
-          </a:p>
-          <a:p>
-            <a:pPr>
-              <a:spcAft>
-                <a:spcPts val="1000"/>
-              </a:spcAft>
-            </a:pPr>
-            <a:r>
-              <a:rPr sz="1300" b="0" i="0">
-                <a:solidFill>
-                  <a:srgbClr val="2B2B2B"/>
-                </a:solidFill>
-                <a:latin typeface="Calibri"/>
-              </a:rPr>
-              <a:t>–   Entregas, rúbricas EV y publicación de notas: solo por </a:t>
-            </a:r>
-            <a:r>
-              <a:rPr sz="1300" b="1" i="0">
-                <a:solidFill>
-                  <a:srgbClr val="2B2B2B"/>
-                </a:solidFill>
-                <a:latin typeface="Calibri"/>
-              </a:rPr>
-              <a:t>CDigital</a:t>
-            </a:r>
-            <a:r>
-              <a:rPr sz="1300" b="0" i="0">
-                <a:solidFill>
-                  <a:srgbClr val="2B2B2B"/>
-                </a:solidFill>
-                <a:latin typeface="Calibri"/>
-              </a:rPr>
-              <a:t>.</a:t>
-            </a:r>
-          </a:p>
-          <a:p>
-            <a:pPr>
-              <a:spcAft>
-                <a:spcPts val="1000"/>
-              </a:spcAft>
-            </a:pPr>
-            <a:r>
-              <a:rPr sz="1300" b="0" i="0">
-                <a:solidFill>
-                  <a:srgbClr val="2B2B2B"/>
-                </a:solidFill>
-                <a:latin typeface="Calibri"/>
-              </a:rPr>
-              <a:t>–   Si Coordinación publica un instrumento formativo sin peso propio, se anuncia en el aula; no inventamos % fuera del syllabus.</a:t>
-            </a:r>
-          </a:p>
-        </p:txBody>
-      </p:sp>
-      <p:sp>
-        <p:nvSpPr>
-          <p:cNvPr id="5" name="TextBox 4"/>
+            <a:pPr algn="ctr"/>
+            <a:r>
+              <a:rPr sz="1500" b="1" i="0">
+                <a:solidFill>
+                  <a:srgbClr val="2B2B2B"/>
+                </a:solidFill>
+                <a:latin typeface="Calibri"/>
+              </a:rPr>
+              <a:t>Libro de calificaciones del aula</a:t>
+            </a:r>
+            <a:r>
+              <a:rPr sz="1500" b="0" i="0">
+                <a:solidFill>
+                  <a:srgbClr val="2B2B2B"/>
+                </a:solidFill>
+                <a:latin typeface="Calibri"/>
+              </a:rPr>
+              <a:t> (CDigital) · cortes 30% / 30% / 40% · los pesos suman </a:t>
+            </a:r>
+            <a:r>
+              <a:rPr sz="1500" b="1" i="0">
+                <a:solidFill>
+                  <a:srgbClr val="2B2B2B"/>
+                </a:solidFill>
+                <a:latin typeface="Calibri"/>
+              </a:rPr>
+              <a:t>100%</a:t>
+            </a:r>
+          </a:p>
+        </p:txBody>
+      </p:sp>
+      <p:graphicFrame>
+        <p:nvGraphicFramePr>
+          <p:cNvPr id="5" name="Table 4"/>
+          <p:cNvGraphicFramePr>
+            <a:graphicFrameLocks noGrp="1"/>
+          </p:cNvGraphicFramePr>
+          <p:nvPr/>
+        </p:nvGraphicFramePr>
+        <p:xfrm>
+          <a:off x="640080" y="2011679"/>
+          <a:ext cx="10911531" cy="4297680"/>
+        </p:xfrm>
+        <a:graphic>
+          <a:graphicData uri="http://schemas.openxmlformats.org/drawingml/2006/table">
+            <a:tbl>
+              <a:tblPr>
+                <a:tableStyleId>{2D5ABB26-0587-4C30-8999-92F81FD0307C}</a:tableStyleId>
+              </a:tblPr>
+              <a:tblGrid>
+                <a:gridCol w="2220931"/>
+                <a:gridCol w="1448433"/>
+                <a:gridCol w="1448433"/>
+                <a:gridCol w="1351871"/>
+                <a:gridCol w="4441863"/>
+              </a:tblGrid>
+              <a:tr h="477520">
+                <a:tc>
+                  <a:txBody>
+                    <a:bodyPr/>
+                    <a:lstStyle/>
+                    <a:p>
+                      <a:pPr algn="l"/>
+                      <a:r>
+                        <a:rPr sz="1300" b="1" i="0">
+                          <a:solidFill>
+                            <a:srgbClr val="FFFFFF"/>
+                          </a:solidFill>
+                          <a:latin typeface="Calibri"/>
+                        </a:rPr>
+                        <a:t>Ítem en CDigital</a:t>
+                      </a:r>
+                    </a:p>
+                  </a:txBody>
+                  <a:tcPr anchor="ctr" marL="109728" marR="91440" marT="36576" marB="36576">
+                    <a:solidFill>
+                      <a:srgbClr val="0C2340"/>
+                    </a:solidFill>
+                  </a:tcPr>
+                </a:tc>
+                <a:tc>
+                  <a:txBody>
+                    <a:bodyPr/>
+                    <a:lstStyle/>
+                    <a:p>
+                      <a:pPr algn="l"/>
+                      <a:r>
+                        <a:rPr sz="1300" b="1" i="0">
+                          <a:solidFill>
+                            <a:srgbClr val="FFFFFF"/>
+                          </a:solidFill>
+                          <a:latin typeface="Calibri"/>
+                        </a:rPr>
+                        <a:t>Tipo</a:t>
+                      </a:r>
+                    </a:p>
+                  </a:txBody>
+                  <a:tcPr anchor="ctr" marL="109728" marR="91440" marT="36576" marB="36576">
+                    <a:solidFill>
+                      <a:srgbClr val="0C2340"/>
+                    </a:solidFill>
+                  </a:tcPr>
+                </a:tc>
+                <a:tc>
+                  <a:txBody>
+                    <a:bodyPr/>
+                    <a:lstStyle/>
+                    <a:p>
+                      <a:pPr algn="l"/>
+                      <a:r>
+                        <a:rPr sz="1300" b="1" i="0">
+                          <a:solidFill>
+                            <a:srgbClr val="FFFFFF"/>
+                          </a:solidFill>
+                          <a:latin typeface="Calibri"/>
+                        </a:rPr>
+                        <a:t>Corte (peso)</a:t>
+                      </a:r>
+                    </a:p>
+                  </a:txBody>
+                  <a:tcPr anchor="ctr" marL="109728" marR="91440" marT="36576" marB="36576">
+                    <a:solidFill>
+                      <a:srgbClr val="0C2340"/>
+                    </a:solidFill>
+                  </a:tcPr>
+                </a:tc>
+                <a:tc>
+                  <a:txBody>
+                    <a:bodyPr/>
+                    <a:lstStyle/>
+                    <a:p>
+                      <a:pPr algn="l"/>
+                      <a:r>
+                        <a:rPr sz="1300" b="1" i="0">
+                          <a:solidFill>
+                            <a:srgbClr val="FFFFFF"/>
+                          </a:solidFill>
+                          <a:latin typeface="Calibri"/>
+                        </a:rPr>
+                        <a:t>Peso del ítem</a:t>
+                      </a:r>
+                    </a:p>
+                  </a:txBody>
+                  <a:tcPr anchor="ctr" marL="109728" marR="91440" marT="36576" marB="36576">
+                    <a:solidFill>
+                      <a:srgbClr val="0C2340"/>
+                    </a:solidFill>
+                  </a:tcPr>
+                </a:tc>
+                <a:tc>
+                  <a:txBody>
+                    <a:bodyPr/>
+                    <a:lstStyle/>
+                    <a:p>
+                      <a:pPr algn="l"/>
+                      <a:r>
+                        <a:rPr sz="1300" b="1" i="0">
+                          <a:solidFill>
+                            <a:srgbClr val="FFFFFF"/>
+                          </a:solidFill>
+                          <a:latin typeface="Calibri"/>
+                        </a:rPr>
+                        <a:t>Cierre</a:t>
+                      </a:r>
+                    </a:p>
+                  </a:txBody>
+                  <a:tcPr anchor="ctr" marL="109728" marR="91440" marT="36576" marB="36576">
+                    <a:solidFill>
+                      <a:srgbClr val="0C2340"/>
+                    </a:solidFill>
+                  </a:tcPr>
+                </a:tc>
+              </a:tr>
+              <a:tr h="477520">
+                <a:tc>
+                  <a:txBody>
+                    <a:bodyPr/>
+                    <a:lstStyle/>
+                    <a:p>
+                      <a:pPr algn="l"/>
+                      <a:r>
+                        <a:rPr sz="1100" b="1" i="0">
+                          <a:solidFill>
+                            <a:srgbClr val="2B2B2B"/>
+                          </a:solidFill>
+                          <a:latin typeface="Calibri"/>
+                        </a:rPr>
+                        <a:t>Quiz 1</a:t>
+                      </a:r>
+                    </a:p>
+                  </a:txBody>
+                  <a:tcPr anchor="ctr" marL="109728" marR="91440" marT="36576" marB="36576">
+                    <a:solidFill>
+                      <a:srgbClr val="FFFFFF"/>
+                    </a:solidFill>
+                  </a:tcPr>
+                </a:tc>
+                <a:tc>
+                  <a:txBody>
+                    <a:bodyPr/>
+                    <a:lstStyle/>
+                    <a:p>
+                      <a:pPr algn="l"/>
+                      <a:r>
+                        <a:rPr sz="1100" b="0" i="0">
+                          <a:solidFill>
+                            <a:srgbClr val="2B2B2B"/>
+                          </a:solidFill>
+                          <a:latin typeface="Calibri"/>
+                        </a:rPr>
+                        <a:t>Cuestionario</a:t>
+                      </a:r>
+                    </a:p>
+                  </a:txBody>
+                  <a:tcPr anchor="ctr" marL="109728" marR="91440" marT="36576" marB="36576">
+                    <a:solidFill>
+                      <a:srgbClr val="FFFFFF"/>
+                    </a:solidFill>
+                  </a:tcPr>
+                </a:tc>
+                <a:tc>
+                  <a:txBody>
+                    <a:bodyPr/>
+                    <a:lstStyle/>
+                    <a:p>
+                      <a:pPr algn="l"/>
+                      <a:r>
+                        <a:rPr sz="1100" b="0" i="0">
+                          <a:solidFill>
+                            <a:srgbClr val="2B2B2B"/>
+                          </a:solidFill>
+                          <a:latin typeface="Calibri"/>
+                        </a:rPr>
+                        <a:t>1 (30%)</a:t>
+                      </a:r>
+                    </a:p>
+                  </a:txBody>
+                  <a:tcPr anchor="ctr" marL="109728" marR="91440" marT="36576" marB="36576">
+                    <a:solidFill>
+                      <a:srgbClr val="FFFFFF"/>
+                    </a:solidFill>
+                  </a:tcPr>
+                </a:tc>
+                <a:tc>
+                  <a:txBody>
+                    <a:bodyPr/>
+                    <a:lstStyle/>
+                    <a:p>
+                      <a:pPr algn="l"/>
+                      <a:r>
+                        <a:rPr sz="1100" b="1" i="0">
+                          <a:solidFill>
+                            <a:srgbClr val="2B2B2B"/>
+                          </a:solidFill>
+                          <a:latin typeface="Calibri"/>
+                        </a:rPr>
+                        <a:t>6%</a:t>
+                      </a:r>
+                    </a:p>
+                  </a:txBody>
+                  <a:tcPr anchor="ctr" marL="109728" marR="91440" marT="36576" marB="36576">
+                    <a:solidFill>
+                      <a:srgbClr val="FFFFFF"/>
+                    </a:solidFill>
+                  </a:tcPr>
+                </a:tc>
+                <a:tc>
+                  <a:txBody>
+                    <a:bodyPr/>
+                    <a:lstStyle/>
+                    <a:p>
+                      <a:pPr algn="l"/>
+                      <a:r>
+                        <a:rPr sz="1100" b="0" i="0">
+                          <a:solidFill>
+                            <a:srgbClr val="2B2B2B"/>
+                          </a:solidFill>
+                          <a:latin typeface="Calibri"/>
+                        </a:rPr>
+                        <a:t>31/08/2026</a:t>
+                      </a:r>
+                    </a:p>
+                  </a:txBody>
+                  <a:tcPr anchor="ctr" marL="109728" marR="91440" marT="36576" marB="36576">
+                    <a:solidFill>
+                      <a:srgbClr val="FFFFFF"/>
+                    </a:solidFill>
+                  </a:tcPr>
+                </a:tc>
+              </a:tr>
+              <a:tr h="477520">
+                <a:tc>
+                  <a:txBody>
+                    <a:bodyPr/>
+                    <a:lstStyle/>
+                    <a:p>
+                      <a:pPr algn="l"/>
+                      <a:r>
+                        <a:rPr sz="1100" b="1" i="0">
+                          <a:solidFill>
+                            <a:srgbClr val="2B2B2B"/>
+                          </a:solidFill>
+                          <a:latin typeface="Calibri"/>
+                        </a:rPr>
+                        <a:t>Parcial 1</a:t>
+                      </a:r>
+                    </a:p>
+                  </a:txBody>
+                  <a:tcPr anchor="ctr" marL="109728" marR="91440" marT="36576" marB="36576">
+                    <a:solidFill>
+                      <a:srgbClr val="F2F2F2"/>
+                    </a:solidFill>
+                  </a:tcPr>
+                </a:tc>
+                <a:tc>
+                  <a:txBody>
+                    <a:bodyPr/>
+                    <a:lstStyle/>
+                    <a:p>
+                      <a:pPr algn="l"/>
+                      <a:r>
+                        <a:rPr sz="1100" b="0" i="0">
+                          <a:solidFill>
+                            <a:srgbClr val="2B2B2B"/>
+                          </a:solidFill>
+                          <a:latin typeface="Calibri"/>
+                        </a:rPr>
+                        <a:t>Cuestionario</a:t>
+                      </a:r>
+                    </a:p>
+                  </a:txBody>
+                  <a:tcPr anchor="ctr" marL="109728" marR="91440" marT="36576" marB="36576">
+                    <a:solidFill>
+                      <a:srgbClr val="F2F2F2"/>
+                    </a:solidFill>
+                  </a:tcPr>
+                </a:tc>
+                <a:tc>
+                  <a:txBody>
+                    <a:bodyPr/>
+                    <a:lstStyle/>
+                    <a:p>
+                      <a:pPr algn="l"/>
+                      <a:r>
+                        <a:rPr sz="1100" b="0" i="0">
+                          <a:solidFill>
+                            <a:srgbClr val="2B2B2B"/>
+                          </a:solidFill>
+                          <a:latin typeface="Calibri"/>
+                        </a:rPr>
+                        <a:t>1 (30%)</a:t>
+                      </a:r>
+                    </a:p>
+                  </a:txBody>
+                  <a:tcPr anchor="ctr" marL="109728" marR="91440" marT="36576" marB="36576">
+                    <a:solidFill>
+                      <a:srgbClr val="F2F2F2"/>
+                    </a:solidFill>
+                  </a:tcPr>
+                </a:tc>
+                <a:tc>
+                  <a:txBody>
+                    <a:bodyPr/>
+                    <a:lstStyle/>
+                    <a:p>
+                      <a:pPr algn="l"/>
+                      <a:r>
+                        <a:rPr sz="1100" b="1" i="0">
+                          <a:solidFill>
+                            <a:srgbClr val="2B2B2B"/>
+                          </a:solidFill>
+                          <a:latin typeface="Calibri"/>
+                        </a:rPr>
+                        <a:t>24%</a:t>
+                      </a:r>
+                    </a:p>
+                  </a:txBody>
+                  <a:tcPr anchor="ctr" marL="109728" marR="91440" marT="36576" marB="36576">
+                    <a:solidFill>
+                      <a:srgbClr val="F2F2F2"/>
+                    </a:solidFill>
+                  </a:tcPr>
+                </a:tc>
+                <a:tc>
+                  <a:txBody>
+                    <a:bodyPr/>
+                    <a:lstStyle/>
+                    <a:p>
+                      <a:pPr algn="l"/>
+                      <a:r>
+                        <a:rPr sz="1100" b="0" i="0">
+                          <a:solidFill>
+                            <a:srgbClr val="2B2B2B"/>
+                          </a:solidFill>
+                          <a:latin typeface="Calibri"/>
+                        </a:rPr>
+                        <a:t>14/09/2026</a:t>
+                      </a:r>
+                    </a:p>
+                  </a:txBody>
+                  <a:tcPr anchor="ctr" marL="109728" marR="91440" marT="36576" marB="36576">
+                    <a:solidFill>
+                      <a:srgbClr val="F2F2F2"/>
+                    </a:solidFill>
+                  </a:tcPr>
+                </a:tc>
+              </a:tr>
+              <a:tr h="477520">
+                <a:tc>
+                  <a:txBody>
+                    <a:bodyPr/>
+                    <a:lstStyle/>
+                    <a:p>
+                      <a:pPr algn="l"/>
+                      <a:r>
+                        <a:rPr sz="1100" b="1" i="0">
+                          <a:solidFill>
+                            <a:srgbClr val="2B2B2B"/>
+                          </a:solidFill>
+                          <a:latin typeface="Calibri"/>
+                        </a:rPr>
+                        <a:t>Quiz 2</a:t>
+                      </a:r>
+                    </a:p>
+                  </a:txBody>
+                  <a:tcPr anchor="ctr" marL="109728" marR="91440" marT="36576" marB="36576">
+                    <a:solidFill>
+                      <a:srgbClr val="FFFFFF"/>
+                    </a:solidFill>
+                  </a:tcPr>
+                </a:tc>
+                <a:tc>
+                  <a:txBody>
+                    <a:bodyPr/>
+                    <a:lstStyle/>
+                    <a:p>
+                      <a:pPr algn="l"/>
+                      <a:r>
+                        <a:rPr sz="1100" b="0" i="0">
+                          <a:solidFill>
+                            <a:srgbClr val="2B2B2B"/>
+                          </a:solidFill>
+                          <a:latin typeface="Calibri"/>
+                        </a:rPr>
+                        <a:t>Cuestionario</a:t>
+                      </a:r>
+                    </a:p>
+                  </a:txBody>
+                  <a:tcPr anchor="ctr" marL="109728" marR="91440" marT="36576" marB="36576">
+                    <a:solidFill>
+                      <a:srgbClr val="FFFFFF"/>
+                    </a:solidFill>
+                  </a:tcPr>
+                </a:tc>
+                <a:tc>
+                  <a:txBody>
+                    <a:bodyPr/>
+                    <a:lstStyle/>
+                    <a:p>
+                      <a:pPr algn="l"/>
+                      <a:r>
+                        <a:rPr sz="1100" b="0" i="0">
+                          <a:solidFill>
+                            <a:srgbClr val="2B2B2B"/>
+                          </a:solidFill>
+                          <a:latin typeface="Calibri"/>
+                        </a:rPr>
+                        <a:t>2 (30%)</a:t>
+                      </a:r>
+                    </a:p>
+                  </a:txBody>
+                  <a:tcPr anchor="ctr" marL="109728" marR="91440" marT="36576" marB="36576">
+                    <a:solidFill>
+                      <a:srgbClr val="FFFFFF"/>
+                    </a:solidFill>
+                  </a:tcPr>
+                </a:tc>
+                <a:tc>
+                  <a:txBody>
+                    <a:bodyPr/>
+                    <a:lstStyle/>
+                    <a:p>
+                      <a:pPr algn="l"/>
+                      <a:r>
+                        <a:rPr sz="1100" b="1" i="0">
+                          <a:solidFill>
+                            <a:srgbClr val="2B2B2B"/>
+                          </a:solidFill>
+                          <a:latin typeface="Calibri"/>
+                        </a:rPr>
+                        <a:t>9%</a:t>
+                      </a:r>
+                    </a:p>
+                  </a:txBody>
+                  <a:tcPr anchor="ctr" marL="109728" marR="91440" marT="36576" marB="36576">
+                    <a:solidFill>
+                      <a:srgbClr val="FFFFFF"/>
+                    </a:solidFill>
+                  </a:tcPr>
+                </a:tc>
+                <a:tc>
+                  <a:txBody>
+                    <a:bodyPr/>
+                    <a:lstStyle/>
+                    <a:p>
+                      <a:pPr algn="l"/>
+                      <a:r>
+                        <a:rPr sz="1100" b="0" i="0">
+                          <a:solidFill>
+                            <a:srgbClr val="2B2B2B"/>
+                          </a:solidFill>
+                          <a:latin typeface="Calibri"/>
+                        </a:rPr>
+                        <a:t>28/09/2026</a:t>
+                      </a:r>
+                    </a:p>
+                  </a:txBody>
+                  <a:tcPr anchor="ctr" marL="109728" marR="91440" marT="36576" marB="36576">
+                    <a:solidFill>
+                      <a:srgbClr val="FFFFFF"/>
+                    </a:solidFill>
+                  </a:tcPr>
+                </a:tc>
+              </a:tr>
+              <a:tr h="477520">
+                <a:tc>
+                  <a:txBody>
+                    <a:bodyPr/>
+                    <a:lstStyle/>
+                    <a:p>
+                      <a:pPr algn="l"/>
+                      <a:r>
+                        <a:rPr sz="1100" b="1" i="0">
+                          <a:solidFill>
+                            <a:srgbClr val="2B2B2B"/>
+                          </a:solidFill>
+                          <a:latin typeface="Calibri"/>
+                        </a:rPr>
+                        <a:t>Parcial 2</a:t>
+                      </a:r>
+                    </a:p>
+                  </a:txBody>
+                  <a:tcPr anchor="ctr" marL="109728" marR="91440" marT="36576" marB="36576">
+                    <a:solidFill>
+                      <a:srgbClr val="F2F2F2"/>
+                    </a:solidFill>
+                  </a:tcPr>
+                </a:tc>
+                <a:tc>
+                  <a:txBody>
+                    <a:bodyPr/>
+                    <a:lstStyle/>
+                    <a:p>
+                      <a:pPr algn="l"/>
+                      <a:r>
+                        <a:rPr sz="1100" b="0" i="0">
+                          <a:solidFill>
+                            <a:srgbClr val="2B2B2B"/>
+                          </a:solidFill>
+                          <a:latin typeface="Calibri"/>
+                        </a:rPr>
+                        <a:t>Cuestionario</a:t>
+                      </a:r>
+                    </a:p>
+                  </a:txBody>
+                  <a:tcPr anchor="ctr" marL="109728" marR="91440" marT="36576" marB="36576">
+                    <a:solidFill>
+                      <a:srgbClr val="F2F2F2"/>
+                    </a:solidFill>
+                  </a:tcPr>
+                </a:tc>
+                <a:tc>
+                  <a:txBody>
+                    <a:bodyPr/>
+                    <a:lstStyle/>
+                    <a:p>
+                      <a:pPr algn="l"/>
+                      <a:r>
+                        <a:rPr sz="1100" b="0" i="0">
+                          <a:solidFill>
+                            <a:srgbClr val="2B2B2B"/>
+                          </a:solidFill>
+                          <a:latin typeface="Calibri"/>
+                        </a:rPr>
+                        <a:t>2 (30%)</a:t>
+                      </a:r>
+                    </a:p>
+                  </a:txBody>
+                  <a:tcPr anchor="ctr" marL="109728" marR="91440" marT="36576" marB="36576">
+                    <a:solidFill>
+                      <a:srgbClr val="F2F2F2"/>
+                    </a:solidFill>
+                  </a:tcPr>
+                </a:tc>
+                <a:tc>
+                  <a:txBody>
+                    <a:bodyPr/>
+                    <a:lstStyle/>
+                    <a:p>
+                      <a:pPr algn="l"/>
+                      <a:r>
+                        <a:rPr sz="1100" b="1" i="0">
+                          <a:solidFill>
+                            <a:srgbClr val="2B2B2B"/>
+                          </a:solidFill>
+                          <a:latin typeface="Calibri"/>
+                        </a:rPr>
+                        <a:t>21%</a:t>
+                      </a:r>
+                    </a:p>
+                  </a:txBody>
+                  <a:tcPr anchor="ctr" marL="109728" marR="91440" marT="36576" marB="36576">
+                    <a:solidFill>
+                      <a:srgbClr val="F2F2F2"/>
+                    </a:solidFill>
+                  </a:tcPr>
+                </a:tc>
+                <a:tc>
+                  <a:txBody>
+                    <a:bodyPr/>
+                    <a:lstStyle/>
+                    <a:p>
+                      <a:pPr algn="l"/>
+                      <a:r>
+                        <a:rPr sz="1100" b="0" i="0">
+                          <a:solidFill>
+                            <a:srgbClr val="2B2B2B"/>
+                          </a:solidFill>
+                          <a:latin typeface="Calibri"/>
+                        </a:rPr>
+                        <a:t>05/10/2026</a:t>
+                      </a:r>
+                    </a:p>
+                  </a:txBody>
+                  <a:tcPr anchor="ctr" marL="109728" marR="91440" marT="36576" marB="36576">
+                    <a:solidFill>
+                      <a:srgbClr val="F2F2F2"/>
+                    </a:solidFill>
+                  </a:tcPr>
+                </a:tc>
+              </a:tr>
+              <a:tr h="477520">
+                <a:tc>
+                  <a:txBody>
+                    <a:bodyPr/>
+                    <a:lstStyle/>
+                    <a:p>
+                      <a:pPr algn="l"/>
+                      <a:r>
+                        <a:rPr sz="1100" b="1" i="0">
+                          <a:solidFill>
+                            <a:srgbClr val="2B2B2B"/>
+                          </a:solidFill>
+                          <a:latin typeface="Calibri"/>
+                        </a:rPr>
+                        <a:t>ACA Final</a:t>
+                      </a:r>
+                    </a:p>
+                  </a:txBody>
+                  <a:tcPr anchor="ctr" marL="109728" marR="91440" marT="36576" marB="36576">
+                    <a:solidFill>
+                      <a:srgbClr val="FFFFFF"/>
+                    </a:solidFill>
+                  </a:tcPr>
+                </a:tc>
+                <a:tc>
+                  <a:txBody>
+                    <a:bodyPr/>
+                    <a:lstStyle/>
+                    <a:p>
+                      <a:pPr algn="l"/>
+                      <a:r>
+                        <a:rPr sz="1100" b="0" i="0">
+                          <a:solidFill>
+                            <a:srgbClr val="2B2B2B"/>
+                          </a:solidFill>
+                          <a:latin typeface="Calibri"/>
+                        </a:rPr>
+                        <a:t>Tarea</a:t>
+                      </a:r>
+                    </a:p>
+                  </a:txBody>
+                  <a:tcPr anchor="ctr" marL="109728" marR="91440" marT="36576" marB="36576">
+                    <a:solidFill>
+                      <a:srgbClr val="FFFFFF"/>
+                    </a:solidFill>
+                  </a:tcPr>
+                </a:tc>
+                <a:tc>
+                  <a:txBody>
+                    <a:bodyPr/>
+                    <a:lstStyle/>
+                    <a:p>
+                      <a:pPr algn="l"/>
+                      <a:r>
+                        <a:rPr sz="1100" b="0" i="0">
+                          <a:solidFill>
+                            <a:srgbClr val="2B2B2B"/>
+                          </a:solidFill>
+                          <a:latin typeface="Calibri"/>
+                        </a:rPr>
+                        <a:t>3 (40%)</a:t>
+                      </a:r>
+                    </a:p>
+                  </a:txBody>
+                  <a:tcPr anchor="ctr" marL="109728" marR="91440" marT="36576" marB="36576">
+                    <a:solidFill>
+                      <a:srgbClr val="FFFFFF"/>
+                    </a:solidFill>
+                  </a:tcPr>
+                </a:tc>
+                <a:tc>
+                  <a:txBody>
+                    <a:bodyPr/>
+                    <a:lstStyle/>
+                    <a:p>
+                      <a:pPr algn="l"/>
+                      <a:r>
+                        <a:rPr sz="1100" b="1" i="0">
+                          <a:solidFill>
+                            <a:srgbClr val="2B2B2B"/>
+                          </a:solidFill>
+                          <a:latin typeface="Calibri"/>
+                        </a:rPr>
+                        <a:t>32,8%</a:t>
+                      </a:r>
+                    </a:p>
+                  </a:txBody>
+                  <a:tcPr anchor="ctr" marL="109728" marR="91440" marT="36576" marB="36576">
+                    <a:solidFill>
+                      <a:srgbClr val="FFFFFF"/>
+                    </a:solidFill>
+                  </a:tcPr>
+                </a:tc>
+                <a:tc>
+                  <a:txBody>
+                    <a:bodyPr/>
+                    <a:lstStyle/>
+                    <a:p>
+                      <a:pPr algn="l"/>
+                      <a:r>
+                        <a:rPr sz="1100" b="0" i="0">
+                          <a:solidFill>
+                            <a:srgbClr val="2B2B2B"/>
+                          </a:solidFill>
+                          <a:latin typeface="Calibri"/>
+                        </a:rPr>
+                        <a:t>14/11/2026</a:t>
+                      </a:r>
+                    </a:p>
+                  </a:txBody>
+                  <a:tcPr anchor="ctr" marL="109728" marR="91440" marT="36576" marB="36576">
+                    <a:solidFill>
+                      <a:srgbClr val="FFFFFF"/>
+                    </a:solidFill>
+                  </a:tcPr>
+                </a:tc>
+              </a:tr>
+              <a:tr h="477520">
+                <a:tc>
+                  <a:txBody>
+                    <a:bodyPr/>
+                    <a:lstStyle/>
+                    <a:p>
+                      <a:pPr algn="l"/>
+                      <a:r>
+                        <a:rPr sz="1100" b="1" i="0">
+                          <a:solidFill>
+                            <a:srgbClr val="2B2B2B"/>
+                          </a:solidFill>
+                          <a:latin typeface="Calibri"/>
+                        </a:rPr>
+                        <a:t>Quiz 3</a:t>
+                      </a:r>
+                    </a:p>
+                  </a:txBody>
+                  <a:tcPr anchor="ctr" marL="109728" marR="91440" marT="36576" marB="36576">
+                    <a:solidFill>
+                      <a:srgbClr val="F2F2F2"/>
+                    </a:solidFill>
+                  </a:tcPr>
+                </a:tc>
+                <a:tc>
+                  <a:txBody>
+                    <a:bodyPr/>
+                    <a:lstStyle/>
+                    <a:p>
+                      <a:pPr algn="l"/>
+                      <a:r>
+                        <a:rPr sz="1100" b="0" i="0">
+                          <a:solidFill>
+                            <a:srgbClr val="2B2B2B"/>
+                          </a:solidFill>
+                          <a:latin typeface="Calibri"/>
+                        </a:rPr>
+                        <a:t>Cuestionario</a:t>
+                      </a:r>
+                    </a:p>
+                  </a:txBody>
+                  <a:tcPr anchor="ctr" marL="109728" marR="91440" marT="36576" marB="36576">
+                    <a:solidFill>
+                      <a:srgbClr val="F2F2F2"/>
+                    </a:solidFill>
+                  </a:tcPr>
+                </a:tc>
+                <a:tc>
+                  <a:txBody>
+                    <a:bodyPr/>
+                    <a:lstStyle/>
+                    <a:p>
+                      <a:pPr algn="l"/>
+                      <a:r>
+                        <a:rPr sz="1100" b="0" i="0">
+                          <a:solidFill>
+                            <a:srgbClr val="2B2B2B"/>
+                          </a:solidFill>
+                          <a:latin typeface="Calibri"/>
+                        </a:rPr>
+                        <a:t>3 (40%)</a:t>
+                      </a:r>
+                    </a:p>
+                  </a:txBody>
+                  <a:tcPr anchor="ctr" marL="109728" marR="91440" marT="36576" marB="36576">
+                    <a:solidFill>
+                      <a:srgbClr val="F2F2F2"/>
+                    </a:solidFill>
+                  </a:tcPr>
+                </a:tc>
+                <a:tc>
+                  <a:txBody>
+                    <a:bodyPr/>
+                    <a:lstStyle/>
+                    <a:p>
+                      <a:pPr algn="l"/>
+                      <a:r>
+                        <a:rPr sz="1100" b="1" i="0">
+                          <a:solidFill>
+                            <a:srgbClr val="2B2B2B"/>
+                          </a:solidFill>
+                          <a:latin typeface="Calibri"/>
+                        </a:rPr>
+                        <a:t>4%</a:t>
+                      </a:r>
+                    </a:p>
+                  </a:txBody>
+                  <a:tcPr anchor="ctr" marL="109728" marR="91440" marT="36576" marB="36576">
+                    <a:solidFill>
+                      <a:srgbClr val="F2F2F2"/>
+                    </a:solidFill>
+                  </a:tcPr>
+                </a:tc>
+                <a:tc>
+                  <a:txBody>
+                    <a:bodyPr/>
+                    <a:lstStyle/>
+                    <a:p>
+                      <a:pPr algn="l"/>
+                      <a:r>
+                        <a:rPr sz="1100" b="0" i="0">
+                          <a:solidFill>
+                            <a:srgbClr val="2B2B2B"/>
+                          </a:solidFill>
+                          <a:latin typeface="Calibri"/>
+                        </a:rPr>
+                        <a:t>26/10/2026</a:t>
+                      </a:r>
+                    </a:p>
+                  </a:txBody>
+                  <a:tcPr anchor="ctr" marL="109728" marR="91440" marT="36576" marB="36576">
+                    <a:solidFill>
+                      <a:srgbClr val="F2F2F2"/>
+                    </a:solidFill>
+                  </a:tcPr>
+                </a:tc>
+              </a:tr>
+              <a:tr h="477520">
+                <a:tc>
+                  <a:txBody>
+                    <a:bodyPr/>
+                    <a:lstStyle/>
+                    <a:p>
+                      <a:pPr algn="l"/>
+                      <a:r>
+                        <a:rPr sz="1100" b="1" i="0">
+                          <a:solidFill>
+                            <a:srgbClr val="2B2B2B"/>
+                          </a:solidFill>
+                          <a:latin typeface="Calibri"/>
+                        </a:rPr>
+                        <a:t>Autoevaluación</a:t>
+                      </a:r>
+                    </a:p>
+                  </a:txBody>
+                  <a:tcPr anchor="ctr" marL="109728" marR="91440" marT="36576" marB="36576">
+                    <a:solidFill>
+                      <a:srgbClr val="FFFFFF"/>
+                    </a:solidFill>
+                  </a:tcPr>
+                </a:tc>
+                <a:tc>
+                  <a:txBody>
+                    <a:bodyPr/>
+                    <a:lstStyle/>
+                    <a:p>
+                      <a:pPr algn="l"/>
+                      <a:r>
+                        <a:rPr sz="1100" b="0" i="0">
+                          <a:solidFill>
+                            <a:srgbClr val="2B2B2B"/>
+                          </a:solidFill>
+                          <a:latin typeface="Calibri"/>
+                        </a:rPr>
+                        <a:t>Cuestionario</a:t>
+                      </a:r>
+                    </a:p>
+                  </a:txBody>
+                  <a:tcPr anchor="ctr" marL="109728" marR="91440" marT="36576" marB="36576">
+                    <a:solidFill>
+                      <a:srgbClr val="FFFFFF"/>
+                    </a:solidFill>
+                  </a:tcPr>
+                </a:tc>
+                <a:tc>
+                  <a:txBody>
+                    <a:bodyPr/>
+                    <a:lstStyle/>
+                    <a:p>
+                      <a:pPr algn="l"/>
+                      <a:r>
+                        <a:rPr sz="1100" b="0" i="0">
+                          <a:solidFill>
+                            <a:srgbClr val="2B2B2B"/>
+                          </a:solidFill>
+                          <a:latin typeface="Calibri"/>
+                        </a:rPr>
+                        <a:t>3 (40%)</a:t>
+                      </a:r>
+                    </a:p>
+                  </a:txBody>
+                  <a:tcPr anchor="ctr" marL="109728" marR="91440" marT="36576" marB="36576">
+                    <a:solidFill>
+                      <a:srgbClr val="FFFFFF"/>
+                    </a:solidFill>
+                  </a:tcPr>
+                </a:tc>
+                <a:tc>
+                  <a:txBody>
+                    <a:bodyPr/>
+                    <a:lstStyle/>
+                    <a:p>
+                      <a:pPr algn="l"/>
+                      <a:r>
+                        <a:rPr sz="1100" b="1" i="0">
+                          <a:solidFill>
+                            <a:srgbClr val="2B2B2B"/>
+                          </a:solidFill>
+                          <a:latin typeface="Calibri"/>
+                        </a:rPr>
+                        <a:t>1,6%</a:t>
+                      </a:r>
+                    </a:p>
+                  </a:txBody>
+                  <a:tcPr anchor="ctr" marL="109728" marR="91440" marT="36576" marB="36576">
+                    <a:solidFill>
+                      <a:srgbClr val="FFFFFF"/>
+                    </a:solidFill>
+                  </a:tcPr>
+                </a:tc>
+                <a:tc>
+                  <a:txBody>
+                    <a:bodyPr/>
+                    <a:lstStyle/>
+                    <a:p>
+                      <a:pPr algn="l"/>
+                      <a:r>
+                        <a:rPr sz="1100" b="0" i="0">
+                          <a:solidFill>
+                            <a:srgbClr val="2B2B2B"/>
+                          </a:solidFill>
+                          <a:latin typeface="Calibri"/>
+                        </a:rPr>
+                        <a:t>22/11/2026</a:t>
+                      </a:r>
+                    </a:p>
+                  </a:txBody>
+                  <a:tcPr anchor="ctr" marL="109728" marR="91440" marT="36576" marB="36576">
+                    <a:solidFill>
+                      <a:srgbClr val="FFFFFF"/>
+                    </a:solidFill>
+                  </a:tcPr>
+                </a:tc>
+              </a:tr>
+              <a:tr h="477520">
+                <a:tc>
+                  <a:txBody>
+                    <a:bodyPr/>
+                    <a:lstStyle/>
+                    <a:p>
+                      <a:pPr algn="l"/>
+                      <a:r>
+                        <a:rPr sz="1100" b="1" i="0">
+                          <a:solidFill>
+                            <a:srgbClr val="2B2B2B"/>
+                          </a:solidFill>
+                          <a:latin typeface="Calibri"/>
+                        </a:rPr>
+                        <a:t>Coevaluación</a:t>
+                      </a:r>
+                    </a:p>
+                  </a:txBody>
+                  <a:tcPr anchor="ctr" marL="109728" marR="91440" marT="36576" marB="36576">
+                    <a:solidFill>
+                      <a:srgbClr val="F2F2F2"/>
+                    </a:solidFill>
+                  </a:tcPr>
+                </a:tc>
+                <a:tc>
+                  <a:txBody>
+                    <a:bodyPr/>
+                    <a:lstStyle/>
+                    <a:p>
+                      <a:pPr algn="l"/>
+                      <a:r>
+                        <a:rPr sz="1100" b="0" i="0">
+                          <a:solidFill>
+                            <a:srgbClr val="2B2B2B"/>
+                          </a:solidFill>
+                          <a:latin typeface="Calibri"/>
+                        </a:rPr>
+                        <a:t>Foro</a:t>
+                      </a:r>
+                    </a:p>
+                  </a:txBody>
+                  <a:tcPr anchor="ctr" marL="109728" marR="91440" marT="36576" marB="36576">
+                    <a:solidFill>
+                      <a:srgbClr val="F2F2F2"/>
+                    </a:solidFill>
+                  </a:tcPr>
+                </a:tc>
+                <a:tc>
+                  <a:txBody>
+                    <a:bodyPr/>
+                    <a:lstStyle/>
+                    <a:p>
+                      <a:pPr algn="l"/>
+                      <a:r>
+                        <a:rPr sz="1100" b="0" i="0">
+                          <a:solidFill>
+                            <a:srgbClr val="2B2B2B"/>
+                          </a:solidFill>
+                          <a:latin typeface="Calibri"/>
+                        </a:rPr>
+                        <a:t>3 (40%)</a:t>
+                      </a:r>
+                    </a:p>
+                  </a:txBody>
+                  <a:tcPr anchor="ctr" marL="109728" marR="91440" marT="36576" marB="36576">
+                    <a:solidFill>
+                      <a:srgbClr val="F2F2F2"/>
+                    </a:solidFill>
+                  </a:tcPr>
+                </a:tc>
+                <a:tc>
+                  <a:txBody>
+                    <a:bodyPr/>
+                    <a:lstStyle/>
+                    <a:p>
+                      <a:pPr algn="l"/>
+                      <a:r>
+                        <a:rPr sz="1100" b="1" i="0">
+                          <a:solidFill>
+                            <a:srgbClr val="2B2B2B"/>
+                          </a:solidFill>
+                          <a:latin typeface="Calibri"/>
+                        </a:rPr>
+                        <a:t>1,6%</a:t>
+                      </a:r>
+                    </a:p>
+                  </a:txBody>
+                  <a:tcPr anchor="ctr" marL="109728" marR="91440" marT="36576" marB="36576">
+                    <a:solidFill>
+                      <a:srgbClr val="F2F2F2"/>
+                    </a:solidFill>
+                  </a:tcPr>
+                </a:tc>
+                <a:tc>
+                  <a:txBody>
+                    <a:bodyPr/>
+                    <a:lstStyle/>
+                    <a:p>
+                      <a:pPr algn="l"/>
+                      <a:r>
+                        <a:rPr sz="1100" b="0" i="0">
+                          <a:solidFill>
+                            <a:srgbClr val="2B2B2B"/>
+                          </a:solidFill>
+                          <a:latin typeface="Calibri"/>
+                        </a:rPr>
+                        <a:t>22/11/2026</a:t>
+                      </a:r>
+                    </a:p>
+                  </a:txBody>
+                  <a:tcPr anchor="ctr" marL="109728" marR="91440" marT="36576" marB="36576">
+                    <a:solidFill>
+                      <a:srgbClr val="F2F2F2"/>
+                    </a:solidFill>
+                  </a:tcPr>
+                </a:tc>
+              </a:tr>
+            </a:tbl>
+          </a:graphicData>
+        </a:graphic>
+      </p:graphicFrame>
+      <p:sp>
+        <p:nvSpPr>
+          <p:cNvPr id="6" name="TextBox 5"/>
           <p:cNvSpPr txBox="1"/>
           <p:nvPr/>
         </p:nvSpPr>
@@ -7650,65 +9105,21 @@
                 </a:solidFill>
                 <a:latin typeface="Calibri"/>
               </a:rPr>
-              <a:t>ACUERDOS DEL CURSO</a:t>
-            </a:r>
-          </a:p>
-        </p:txBody>
-      </p:sp>
-      <p:sp>
-        <p:nvSpPr>
-          <p:cNvPr id="4" name="Rounded Rectangle 3"/>
-          <p:cNvSpPr/>
-          <p:nvPr/>
-        </p:nvSpPr>
-        <p:spPr>
-          <a:xfrm>
-            <a:off x="640080" y="1737360"/>
-            <a:ext cx="10911535" cy="969264"/>
-          </a:xfrm>
-          <a:prstGeom prst="roundRect">
-            <a:avLst/>
-          </a:prstGeom>
-          <a:solidFill>
-            <a:srgbClr val="E8F5EC"/>
-          </a:solidFill>
-          <a:ln>
-            <a:noFill/>
-          </a:ln>
-          <a:effectLst/>
-        </p:spPr>
-        <p:style>
-          <a:lnRef idx="1">
-            <a:schemeClr val="accent1"/>
-          </a:lnRef>
-          <a:fillRef idx="3">
-            <a:schemeClr val="accent1"/>
-          </a:fillRef>
-          <a:effectRef idx="2">
-            <a:schemeClr val="accent1"/>
-          </a:effectRef>
-          <a:fontRef idx="minor">
-            <a:schemeClr val="lt1"/>
-          </a:fontRef>
-        </p:style>
-        <p:txBody>
-          <a:bodyPr rtlCol="0" anchor="ctr"/>
-          <a:lstStyle/>
-          <a:p>
-            <a:pPr algn="ctr"/>
-          </a:p>
-        </p:txBody>
-      </p:sp>
-      <p:sp>
-        <p:nvSpPr>
-          <p:cNvPr id="5" name="TextBox 4"/>
+              <a:t>ALCANCE DE LA EVALUACIÓN</a:t>
+            </a:r>
+          </a:p>
+        </p:txBody>
+      </p:sp>
+      <p:sp>
+        <p:nvSpPr>
+          <p:cNvPr id="4" name="TextBox 3"/>
           <p:cNvSpPr txBox="1"/>
           <p:nvPr/>
         </p:nvSpPr>
         <p:spPr>
           <a:xfrm>
-            <a:off x="868680" y="1847088"/>
-            <a:ext cx="10454335" cy="749808"/>
+            <a:off x="640080" y="1691639"/>
+            <a:ext cx="10911535" cy="4617720"/>
           </a:xfrm>
           <a:prstGeom prst="rect">
             <a:avLst/>
@@ -7721,21 +9132,62 @@
           </a:bodyPr>
           <a:lstStyle/>
           <a:p>
+            <a:pPr>
+              <a:spcAft>
+                <a:spcPts val="1000"/>
+              </a:spcAft>
+            </a:pPr>
+            <a:r>
+              <a:rPr sz="1300" b="0" i="0">
+                <a:solidFill>
+                  <a:srgbClr val="2B2B2B"/>
+                </a:solidFill>
+                <a:latin typeface="Calibri"/>
+              </a:rPr>
+              <a:t>–   </a:t>
+            </a:r>
             <a:r>
               <a:rPr sz="1300" b="1" i="0">
                 <a:solidFill>
-                  <a:srgbClr val="0C2340"/>
-                </a:solidFill>
-                <a:latin typeface="Calibri"/>
-              </a:rPr>
-              <a:t>ℹ️ Nota institucional</a:t>
+                  <a:srgbClr val="2B2B2B"/>
+                </a:solidFill>
+                <a:latin typeface="Calibri"/>
+              </a:rPr>
+              <a:t>Régimen:</a:t>
+            </a:r>
+            <a:r>
+              <a:rPr sz="1300" b="0" i="0">
+                <a:solidFill>
+                  <a:srgbClr val="2B2B2B"/>
+                </a:solidFill>
+                <a:latin typeface="Calibri"/>
+              </a:rPr>
+              <a:t> Art. 52 · </a:t>
+            </a:r>
+            <a:r>
+              <a:rPr sz="1300" b="1" i="0">
+                <a:solidFill>
+                  <a:srgbClr val="2B2B2B"/>
+                </a:solidFill>
+                <a:latin typeface="Calibri"/>
+              </a:rPr>
+              <a:t>Corte 1 = 30% · Corte 2 = 30% · Corte 3 = 40%</a:t>
+            </a:r>
+            <a:r>
+              <a:rPr sz="1300" b="0" i="0">
+                <a:solidFill>
+                  <a:srgbClr val="2B2B2B"/>
+                </a:solidFill>
+                <a:latin typeface="Calibri"/>
+              </a:rPr>
+              <a:t>, tomados del libro de calificaciones del aula (sigue sin cargarse el Syllabus SIAC de TG2).</a:t>
             </a:r>
           </a:p>
           <a:p>
             <a:pPr>
-              <a:spcBef>
-                <a:spcPts val="400"/>
-              </a:spcBef>
+              <a:spcAft>
+                <a:spcPts val="1000"/>
+              </a:spcAft>
             </a:pPr>
             <a:r>
               <a:rPr sz="1300" b="0" i="0">
@@ -7744,7 +9196,7 @@
                 </a:solidFill>
                 <a:latin typeface="Calibri"/>
               </a:rPr>
-              <a:t>Encuentro sincrónico: </a:t>
+              <a:t>–   </a:t>
             </a:r>
             <a:r>
               <a:rPr sz="1300" b="1" i="0">
@@ -7753,7 +9205,7 @@
                 </a:solidFill>
                 <a:latin typeface="Calibri"/>
               </a:rPr>
-              <a:t>Lunes, 5:00 pm – 6:00 pm</a:t>
+              <a:t>Cada corte se compone de ítems concretos del aula</a:t>
             </a:r>
             <a:r>
               <a:rPr sz="1300" b="0" i="0">
@@ -7762,92 +9214,84 @@
                 </a:solidFill>
                 <a:latin typeface="Calibri"/>
               </a:rPr>
-              <a:t> por Google Meet. El Meet es el mismo enlace para toda la serie.</a:t>
-            </a:r>
-          </a:p>
-        </p:txBody>
-      </p:sp>
-      <p:sp>
-        <p:nvSpPr>
-          <p:cNvPr id="6" name="Rounded Rectangle 5"/>
-          <p:cNvSpPr/>
-          <p:nvPr/>
-        </p:nvSpPr>
-        <p:spPr>
-          <a:xfrm>
-            <a:off x="640080" y="2935224"/>
-            <a:ext cx="10911535" cy="969264"/>
-          </a:xfrm>
-          <a:prstGeom prst="roundRect">
-            <a:avLst/>
-          </a:prstGeom>
-          <a:solidFill>
-            <a:srgbClr val="FDECD8"/>
-          </a:solidFill>
-          <a:ln>
-            <a:noFill/>
-          </a:ln>
-          <a:effectLst/>
-        </p:spPr>
-        <p:style>
-          <a:lnRef idx="1">
-            <a:schemeClr val="accent1"/>
-          </a:lnRef>
-          <a:fillRef idx="3">
-            <a:schemeClr val="accent1"/>
-          </a:fillRef>
-          <a:effectRef idx="2">
-            <a:schemeClr val="accent1"/>
-          </a:effectRef>
-          <a:fontRef idx="minor">
-            <a:schemeClr val="lt1"/>
-          </a:fontRef>
-        </p:style>
-        <p:txBody>
-          <a:bodyPr rtlCol="0" anchor="ctr"/>
-          <a:lstStyle/>
-          <a:p>
-            <a:pPr algn="ctr"/>
-          </a:p>
-        </p:txBody>
-      </p:sp>
-      <p:sp>
-        <p:nvSpPr>
-          <p:cNvPr id="7" name="TextBox 6"/>
-          <p:cNvSpPr txBox="1"/>
-          <p:nvPr/>
-        </p:nvSpPr>
-        <p:spPr>
-          <a:xfrm>
-            <a:off x="868680" y="3044952"/>
-            <a:ext cx="10454335" cy="749808"/>
-          </a:xfrm>
-          <a:prstGeom prst="rect">
-            <a:avLst/>
-          </a:prstGeom>
-          <a:noFill/>
-        </p:spPr>
-        <p:txBody>
-          <a:bodyPr wrap="square" anchor="t" lIns="0" rIns="0" tIns="0" bIns="0">
-            <a:spAutoFit/>
-          </a:bodyPr>
-          <a:lstStyle/>
-          <a:p>
+              <a:t> — nombre exacto, tipo de actividad, peso y cierre: en la tabla «CÓMO SE CALIFICA» de esta presentación.</a:t>
+            </a:r>
+          </a:p>
+          <a:p>
+            <a:pPr>
+              <a:spcAft>
+                <a:spcPts val="1000"/>
+              </a:spcAft>
+            </a:pPr>
+            <a:r>
+              <a:rPr sz="1300" b="0" i="0">
+                <a:solidFill>
+                  <a:srgbClr val="2B2B2B"/>
+                </a:solidFill>
+                <a:latin typeface="Calibri"/>
+              </a:rPr>
+              <a:t>–   </a:t>
+            </a:r>
             <a:r>
               <a:rPr sz="1300" b="1" i="0">
                 <a:solidFill>
-                  <a:srgbClr val="0C2340"/>
-                </a:solidFill>
-                <a:latin typeface="Calibri"/>
-              </a:rPr>
-              <a:t>💡 Aclaración</a:t>
+                  <a:srgbClr val="2B2B2B"/>
+                </a:solidFill>
+                <a:latin typeface="Calibri"/>
+              </a:rPr>
+              <a:t>Autoevaluación (1,6%, cuestionario)</a:t>
+            </a:r>
+            <a:r>
+              <a:rPr sz="1300" b="0" i="0">
+                <a:solidFill>
+                  <a:srgbClr val="2B2B2B"/>
+                </a:solidFill>
+                <a:latin typeface="Calibri"/>
+              </a:rPr>
+              <a:t> y </a:t>
+            </a:r>
+            <a:r>
+              <a:rPr sz="1300" b="1" i="0">
+                <a:solidFill>
+                  <a:srgbClr val="2B2B2B"/>
+                </a:solidFill>
+                <a:latin typeface="Calibri"/>
+              </a:rPr>
+              <a:t>coevaluación (1,6%, foro)</a:t>
+            </a:r>
+            <a:r>
+              <a:rPr sz="1300" b="0" i="0">
+                <a:solidFill>
+                  <a:srgbClr val="2B2B2B"/>
+                </a:solidFill>
+                <a:latin typeface="Calibri"/>
+              </a:rPr>
+              <a:t> </a:t>
+            </a:r>
+            <a:r>
+              <a:rPr sz="1300" b="1" i="0">
+                <a:solidFill>
+                  <a:srgbClr val="2B2B2B"/>
+                </a:solidFill>
+                <a:latin typeface="Calibri"/>
+              </a:rPr>
+              <a:t>sí hacen parte</a:t>
+            </a:r>
+            <a:r>
+              <a:rPr sz="1300" b="0" i="0">
+                <a:solidFill>
+                  <a:srgbClr val="2B2B2B"/>
+                </a:solidFill>
+                <a:latin typeface="Calibri"/>
+              </a:rPr>
+              <a:t> de la nota de este curso: van en el tercer corte y se diligencian/participan en el aula.</a:t>
             </a:r>
           </a:p>
           <a:p>
             <a:pPr>
-              <a:spcBef>
-                <a:spcPts val="400"/>
-              </a:spcBef>
+              <a:spcAft>
+                <a:spcPts val="1000"/>
+              </a:spcAft>
             </a:pPr>
             <a:r>
               <a:rPr sz="1300" b="0" i="0">
@@ -7856,7 +9300,7 @@
                 </a:solidFill>
                 <a:latin typeface="Calibri"/>
               </a:rPr>
-              <a:t>Lunes festivo = </a:t>
+              <a:t>–   Los </a:t>
             </a:r>
             <a:r>
               <a:rPr sz="1300" b="1" i="0">
@@ -7865,7 +9309,7 @@
                 </a:solidFill>
                 <a:latin typeface="Calibri"/>
               </a:rPr>
-              <a:t>clase autónoma</a:t>
+              <a:t>quices y parciales</a:t>
             </a:r>
             <a:r>
               <a:rPr sz="1300" b="0" i="0">
@@ -7874,92 +9318,32 @@
                 </a:solidFill>
                 <a:latin typeface="Calibri"/>
               </a:rPr>
-              <a:t> (guía/actividad en el CDigital), no se pierde el hilo del proyecto.</a:t>
-            </a:r>
-          </a:p>
-        </p:txBody>
-      </p:sp>
-      <p:sp>
-        <p:nvSpPr>
-          <p:cNvPr id="8" name="Rounded Rectangle 7"/>
-          <p:cNvSpPr/>
-          <p:nvPr/>
-        </p:nvSpPr>
-        <p:spPr>
-          <a:xfrm>
-            <a:off x="640080" y="4133087"/>
-            <a:ext cx="10911535" cy="969264"/>
-          </a:xfrm>
-          <a:prstGeom prst="roundRect">
-            <a:avLst/>
-          </a:prstGeom>
-          <a:solidFill>
-            <a:srgbClr val="FBE4E4"/>
-          </a:solidFill>
-          <a:ln>
-            <a:noFill/>
-          </a:ln>
-          <a:effectLst/>
-        </p:spPr>
-        <p:style>
-          <a:lnRef idx="1">
-            <a:schemeClr val="accent1"/>
-          </a:lnRef>
-          <a:fillRef idx="3">
-            <a:schemeClr val="accent1"/>
-          </a:fillRef>
-          <a:effectRef idx="2">
-            <a:schemeClr val="accent1"/>
-          </a:effectRef>
-          <a:fontRef idx="minor">
-            <a:schemeClr val="lt1"/>
-          </a:fontRef>
-        </p:style>
-        <p:txBody>
-          <a:bodyPr rtlCol="0" anchor="ctr"/>
-          <a:lstStyle/>
-          <a:p>
-            <a:pPr algn="ctr"/>
-          </a:p>
-        </p:txBody>
-      </p:sp>
-      <p:sp>
-        <p:nvSpPr>
-          <p:cNvPr id="9" name="TextBox 8"/>
-          <p:cNvSpPr txBox="1"/>
-          <p:nvPr/>
-        </p:nvSpPr>
-        <p:spPr>
-          <a:xfrm>
-            <a:off x="868680" y="4242816"/>
-            <a:ext cx="10454335" cy="749808"/>
-          </a:xfrm>
-          <a:prstGeom prst="rect">
-            <a:avLst/>
-          </a:prstGeom>
-          <a:noFill/>
-        </p:spPr>
-        <p:txBody>
-          <a:bodyPr wrap="square" anchor="t" lIns="0" rIns="0" tIns="0" bIns="0">
-            <a:spAutoFit/>
-          </a:bodyPr>
-          <a:lstStyle/>
-          <a:p>
+              <a:t> son cuestionarios en CDigital y cierran en día de clase; la </a:t>
+            </a:r>
             <a:r>
               <a:rPr sz="1300" b="1" i="0">
                 <a:solidFill>
-                  <a:srgbClr val="0C2340"/>
-                </a:solidFill>
-                <a:latin typeface="Calibri"/>
-              </a:rPr>
-              <a:t>⚠️ Importante</a:t>
+                  <a:srgbClr val="2B2B2B"/>
+                </a:solidFill>
+                <a:latin typeface="Calibri"/>
+              </a:rPr>
+              <a:t>ACA Final</a:t>
+            </a:r>
+            <a:r>
+              <a:rPr sz="1300" b="0" i="0">
+                <a:solidFill>
+                  <a:srgbClr val="2B2B2B"/>
+                </a:solidFill>
+                <a:latin typeface="Calibri"/>
+              </a:rPr>
+              <a:t> es una tarea (documento) y cierra en la fecha máxima de recepción.</a:t>
             </a:r>
           </a:p>
           <a:p>
             <a:pPr>
-              <a:spcBef>
-                <a:spcPts val="400"/>
-              </a:spcBef>
+              <a:spcAft>
+                <a:spcPts val="1000"/>
+              </a:spcAft>
             </a:pPr>
             <a:r>
               <a:rPr sz="1300" b="0" i="0">
@@ -7968,14 +9352,100 @@
                 </a:solidFill>
                 <a:latin typeface="Calibri"/>
               </a:rPr>
-              <a:t>Hasta cargar el Syllabus SIAC, cualquier detalle de rubrica/pesos se verifica en el aula virtual.</a:t>
-            </a:r>
-          </a:p>
-        </p:txBody>
-      </p:sp>
-      <p:sp>
-        <p:nvSpPr>
-          <p:cNvPr id="10" name="TextBox 9"/>
+              <a:t>–   No confundir con la autoevaluación </a:t>
+            </a:r>
+            <a:r>
+              <a:rPr sz="1300" b="1" i="0">
+                <a:solidFill>
+                  <a:srgbClr val="2B2B2B"/>
+                </a:solidFill>
+                <a:latin typeface="Calibri"/>
+              </a:rPr>
+              <a:t>institucional</a:t>
+            </a:r>
+            <a:r>
+              <a:rPr sz="1300" b="0" i="0">
+                <a:solidFill>
+                  <a:srgbClr val="2B2B2B"/>
+                </a:solidFill>
+                <a:latin typeface="Calibri"/>
+              </a:rPr>
+              <a:t> SIAC (calidad de programas en acreditacion.cun.edu.co): esa no es una nota del curso.</a:t>
+            </a:r>
+          </a:p>
+          <a:p>
+            <a:pPr>
+              <a:spcAft>
+                <a:spcPts val="1000"/>
+              </a:spcAft>
+            </a:pPr>
+            <a:r>
+              <a:rPr sz="1300" b="0" i="0">
+                <a:solidFill>
+                  <a:srgbClr val="2B2B2B"/>
+                </a:solidFill>
+                <a:latin typeface="Calibri"/>
+              </a:rPr>
+              <a:t>–   Entregas, rúbricas y publicación de notas: solo por </a:t>
+            </a:r>
+            <a:r>
+              <a:rPr sz="1300" b="1" i="0">
+                <a:solidFill>
+                  <a:srgbClr val="2B2B2B"/>
+                </a:solidFill>
+                <a:latin typeface="Calibri"/>
+              </a:rPr>
+              <a:t>CDigital</a:t>
+            </a:r>
+            <a:r>
+              <a:rPr sz="1300" b="0" i="0">
+                <a:solidFill>
+                  <a:srgbClr val="2B2B2B"/>
+                </a:solidFill>
+                <a:latin typeface="Calibri"/>
+              </a:rPr>
+              <a:t>.</a:t>
+            </a:r>
+          </a:p>
+          <a:p>
+            <a:pPr>
+              <a:spcAft>
+                <a:spcPts val="1000"/>
+              </a:spcAft>
+            </a:pPr>
+            <a:r>
+              <a:rPr sz="1300" b="0" i="0">
+                <a:solidFill>
+                  <a:srgbClr val="2B2B2B"/>
+                </a:solidFill>
+                <a:latin typeface="Calibri"/>
+              </a:rPr>
+              <a:t>–   Si un peso o una ventana del aula no coincide con este material, </a:t>
+            </a:r>
+            <a:r>
+              <a:rPr sz="1300" b="1" i="0">
+                <a:solidFill>
+                  <a:srgbClr val="2B2B2B"/>
+                </a:solidFill>
+                <a:latin typeface="Calibri"/>
+              </a:rPr>
+              <a:t>manda el aula</a:t>
+            </a:r>
+            <a:r>
+              <a:rPr sz="1300" b="0" i="0">
+                <a:solidFill>
+                  <a:srgbClr val="2B2B2B"/>
+                </a:solidFill>
+                <a:latin typeface="Calibri"/>
+              </a:rPr>
+              <a:t>: se corrige aquí y se avisa en clase.</a:t>
+            </a:r>
+          </a:p>
+        </p:txBody>
+      </p:sp>
+      <p:sp>
+        <p:nvSpPr>
+          <p:cNvPr id="5" name="TextBox 4"/>
           <p:cNvSpPr txBox="1"/>
           <p:nvPr/>
         </p:nvSpPr>

--- a/Pregrado/Trabajo de grado 2/Clases/Presentacion del Curso - Trabajo de Grado 2.pptx
+++ b/Pregrado/Trabajo de grado 2/Clases/Presentacion del Curso - Trabajo de Grado 2.pptx
@@ -3800,7 +3800,7 @@
         <p:spPr>
           <a:xfrm>
             <a:off x="640080" y="2935224"/>
-            <a:ext cx="10911535" cy="969264"/>
+            <a:ext cx="10911535" cy="1225296"/>
           </a:xfrm>
           <a:prstGeom prst="roundRect">
             <a:avLst/>
@@ -3844,7 +3844,7 @@
         <p:spPr>
           <a:xfrm>
             <a:off x="868680" y="3044952"/>
-            <a:ext cx="10454335" cy="749808"/>
+            <a:ext cx="10454335" cy="1005840"/>
           </a:xfrm>
           <a:prstGeom prst="rect">
             <a:avLst/>
@@ -3898,7 +3898,43 @@
                 </a:solidFill>
                 <a:latin typeface="Calibri"/>
               </a:rPr>
-              <a:t> (guía/actividad en el CDigital), no se pierde el hilo del proyecto.</a:t>
+              <a:t>, no se pierde el hilo del proyecto: la actividad y el material quedan en la </a:t>
+            </a:r>
+            <a:r>
+              <a:rPr sz="1300" b="1" i="0">
+                <a:solidFill>
+                  <a:srgbClr val="2B2B2B"/>
+                </a:solidFill>
+                <a:latin typeface="Calibri"/>
+              </a:rPr>
+              <a:t>carpeta de esa sesión en el Drive de clases</a:t>
+            </a:r>
+            <a:r>
+              <a:rPr sz="1300" b="0" i="0">
+                <a:solidFill>
+                  <a:srgbClr val="2B2B2B"/>
+                </a:solidFill>
+                <a:latin typeface="Calibri"/>
+              </a:rPr>
+              <a:t> (`Clases/Sesion NN - …/`); la entrega y la nota siguen en </a:t>
+            </a:r>
+            <a:r>
+              <a:rPr sz="1300" b="1" i="0">
+                <a:solidFill>
+                  <a:srgbClr val="2B2B2B"/>
+                </a:solidFill>
+                <a:latin typeface="Calibri"/>
+              </a:rPr>
+              <a:t>CDigital</a:t>
+            </a:r>
+            <a:r>
+              <a:rPr sz="1300" b="0" i="0">
+                <a:solidFill>
+                  <a:srgbClr val="2B2B2B"/>
+                </a:solidFill>
+                <a:latin typeface="Calibri"/>
+              </a:rPr>
+              <a:t>.</a:t>
             </a:r>
           </a:p>
         </p:txBody>
@@ -3911,7 +3947,7 @@
         </p:nvSpPr>
         <p:spPr>
           <a:xfrm>
-            <a:off x="640080" y="4133087"/>
+            <a:off x="640080" y="4389120"/>
             <a:ext cx="10911535" cy="969264"/>
           </a:xfrm>
           <a:prstGeom prst="roundRect">
@@ -3955,7 +3991,7 @@
         </p:nvSpPr>
         <p:spPr>
           <a:xfrm>
-            <a:off x="868680" y="4242816"/>
+            <a:off x="868680" y="4498848"/>
             <a:ext cx="10454335" cy="749808"/>
           </a:xfrm>
           <a:prstGeom prst="rect">
@@ -4300,6 +4336,76 @@
                 </a:solidFill>
                 <a:latin typeface="Calibri"/>
               </a:rPr>
+              <a:t>Material de clases (Drive):</a:t>
+            </a:r>
+            <a:r>
+              <a:rPr sz="1600" b="0" i="0">
+                <a:solidFill>
+                  <a:srgbClr val="2B2B2B"/>
+                </a:solidFill>
+                <a:latin typeface="Calibri"/>
+              </a:rPr>
+              <a:t> </a:t>
+            </a:r>
+            <a:r>
+              <a:rPr sz="1600" b="1" i="0">
+                <a:solidFill>
+                  <a:srgbClr val="2B2B2B"/>
+                </a:solidFill>
+                <a:latin typeface="Calibri"/>
+              </a:rPr>
+              <a:t>[URL Material de clases — carpeta Clases/ en Drive · Trabajo de Grado 2]</a:t>
+            </a:r>
+            <a:r>
+              <a:rPr sz="1600" b="0" i="0">
+                <a:solidFill>
+                  <a:srgbClr val="2B2B2B"/>
+                </a:solidFill>
+                <a:latin typeface="Calibri"/>
+              </a:rPr>
+              <a:t> — aquí está el material de cada sesión, incluida la de una </a:t>
+            </a:r>
+            <a:r>
+              <a:rPr sz="1600" b="1" i="0">
+                <a:solidFill>
+                  <a:srgbClr val="2B2B2B"/>
+                </a:solidFill>
+                <a:latin typeface="Calibri"/>
+              </a:rPr>
+              <a:t>clase autónoma</a:t>
+            </a:r>
+            <a:r>
+              <a:rPr sz="1600" b="0" i="0">
+                <a:solidFill>
+                  <a:srgbClr val="2B2B2B"/>
+                </a:solidFill>
+                <a:latin typeface="Calibri"/>
+              </a:rPr>
+              <a:t>.</a:t>
+            </a:r>
+          </a:p>
+          <a:p>
+            <a:pPr>
+              <a:spcAft>
+                <a:spcPts val="1000"/>
+              </a:spcAft>
+            </a:pPr>
+            <a:r>
+              <a:rPr sz="1600" b="0" i="0">
+                <a:solidFill>
+                  <a:srgbClr val="2B2B2B"/>
+                </a:solidFill>
+                <a:latin typeface="Calibri"/>
+              </a:rPr>
+              <a:t>–   </a:t>
+            </a:r>
+            <a:r>
+              <a:rPr sz="1600" b="1" i="0">
+                <a:solidFill>
+                  <a:srgbClr val="2B2B2B"/>
+                </a:solidFill>
+                <a:latin typeface="Calibri"/>
+              </a:rPr>
               <a:t>Plantilla APA CUN – Proyecto de Grado</a:t>
             </a:r>
             <a:r>
@@ -5166,7 +5272,7 @@
                 </a:solidFill>
                 <a:latin typeface="Calibri"/>
               </a:rPr>
-              <a:t>Tablero colaborativo (Padlet)</a:t>
+              <a:t>Formulario de Google · encuestas y Q&amp;A en el propio Meet</a:t>
             </a:r>
           </a:p>
         </p:txBody>
@@ -5199,7 +5305,7 @@
               </a:spcAft>
             </a:pPr>
             <a:r>
-              <a:rPr sz="1400" b="0" i="0">
+              <a:rPr sz="1300" b="0" i="0">
                 <a:solidFill>
                   <a:srgbClr val="2B2B2B"/>
                 </a:solidFill>
@@ -5208,22 +5314,22 @@
               <a:t>–   </a:t>
             </a:r>
             <a:r>
-              <a:rPr sz="1400" b="1" i="0">
-                <a:solidFill>
-                  <a:srgbClr val="2B2B2B"/>
-                </a:solidFill>
-                <a:latin typeface="Calibri"/>
-              </a:rPr>
-              <a:t>Escanea o abre:</a:t>
-            </a:r>
-            <a:r>
-              <a:rPr sz="1400" b="0" i="0">
-                <a:solidFill>
-                  <a:srgbClr val="2B2B2B"/>
-                </a:solidFill>
-                <a:latin typeface="Calibri"/>
-              </a:rPr>
-              <a:t> https://padlet.com/andres_dfx/cun-wruz81hmf9k06gd7</a:t>
+              <a:rPr sz="1300" b="1" i="0">
+                <a:solidFill>
+                  <a:srgbClr val="2B2B2B"/>
+                </a:solidFill>
+                <a:latin typeface="Calibri"/>
+              </a:rPr>
+              <a:t>Escanea el QR o abre:</a:t>
+            </a:r>
+            <a:r>
+              <a:rPr sz="1300" b="0" i="0">
+                <a:solidFill>
+                  <a:srgbClr val="2B2B2B"/>
+                </a:solidFill>
+                <a:latin typeface="Calibri"/>
+              </a:rPr>
+              <a:t> [URL Formulario Preséntate — pendiente · TRABAJO DE GRADO 2]</a:t>
             </a:r>
           </a:p>
           <a:p>
@@ -5233,16 +5339,34 @@
               </a:spcAft>
             </a:pPr>
             <a:r>
-              <a:rPr sz="1400" b="0" i="0">
-                <a:solidFill>
-                  <a:srgbClr val="2B2B2B"/>
-                </a:solidFill>
-                <a:latin typeface="Calibri"/>
-              </a:rPr>
-              <a:t>–   Post-it: </a:t>
-            </a:r>
-            <a:r>
-              <a:rPr sz="1400" b="1" i="0">
+              <a:rPr sz="1300" b="0" i="0">
+                <a:solidFill>
+                  <a:srgbClr val="2B2B2B"/>
+                </a:solidFill>
+                <a:latin typeface="Calibri"/>
+              </a:rPr>
+              <a:t>–   </a:t>
+            </a:r>
+            <a:r>
+              <a:rPr sz="1300" b="1" i="0">
+                <a:solidFill>
+                  <a:srgbClr val="2B2B2B"/>
+                </a:solidFill>
+                <a:latin typeface="Calibri"/>
+              </a:rPr>
+              <a:t>Qué respondes (1 min):</a:t>
+            </a:r>
+            <a:r>
+              <a:rPr sz="1300" b="0" i="0">
+                <a:solidFill>
+                  <a:srgbClr val="2B2B2B"/>
+                </a:solidFill>
+                <a:latin typeface="Calibri"/>
+              </a:rPr>
+              <a:t> tu </a:t>
+            </a:r>
+            <a:r>
+              <a:rPr sz="1300" b="1" i="0">
                 <a:solidFill>
                   <a:srgbClr val="2B2B2B"/>
                 </a:solidFill>
@@ -5251,16 +5375,16 @@
               <a:t>nombre</a:t>
             </a:r>
             <a:r>
-              <a:rPr sz="1400" b="0" i="0">
-                <a:solidFill>
-                  <a:srgbClr val="2B2B2B"/>
-                </a:solidFill>
-                <a:latin typeface="Calibri"/>
-              </a:rPr>
-              <a:t> + </a:t>
-            </a:r>
-            <a:r>
-              <a:rPr sz="1400" b="1" i="0">
+              <a:rPr sz="1300" b="0" i="0">
+                <a:solidFill>
+                  <a:srgbClr val="2B2B2B"/>
+                </a:solidFill>
+                <a:latin typeface="Calibri"/>
+              </a:rPr>
+              <a:t> + el </a:t>
+            </a:r>
+            <a:r>
+              <a:rPr sz="1300" b="1" i="0">
                 <a:solidFill>
                   <a:srgbClr val="2B2B2B"/>
                 </a:solidFill>
@@ -5269,13 +5393,49 @@
               <a:t>estado actual</a:t>
             </a:r>
             <a:r>
-              <a:rPr sz="1400" b="0" i="0">
-                <a:solidFill>
-                  <a:srgbClr val="2B2B2B"/>
-                </a:solidFill>
-                <a:latin typeface="Calibri"/>
-              </a:rPr>
-              <a:t> del proyecto (1 frase) + expectativa de TG2.</a:t>
+              <a:rPr sz="1300" b="0" i="0">
+                <a:solidFill>
+                  <a:srgbClr val="2B2B2B"/>
+                </a:solidFill>
+                <a:latin typeface="Calibri"/>
+              </a:rPr>
+              <a:t> de tu proyecto (1 frase) + tu </a:t>
+            </a:r>
+            <a:r>
+              <a:rPr sz="1300" b="1" i="0">
+                <a:solidFill>
+                  <a:srgbClr val="2B2B2B"/>
+                </a:solidFill>
+                <a:latin typeface="Calibri"/>
+              </a:rPr>
+              <a:t>expectativa de TG2</a:t>
+            </a:r>
+            <a:r>
+              <a:rPr sz="1300" b="0" i="0">
+                <a:solidFill>
+                  <a:srgbClr val="2B2B2B"/>
+                </a:solidFill>
+                <a:latin typeface="Calibri"/>
+              </a:rPr>
+              <a:t>. Entras con tu correo </a:t>
+            </a:r>
+            <a:r>
+              <a:rPr sz="1300" b="1" i="0">
+                <a:solidFill>
+                  <a:srgbClr val="2B2B2B"/>
+                </a:solidFill>
+                <a:latin typeface="Calibri"/>
+              </a:rPr>
+              <a:t>@cun.edu.co</a:t>
+            </a:r>
+            <a:r>
+              <a:rPr sz="1300" b="0" i="0">
+                <a:solidFill>
+                  <a:srgbClr val="2B2B2B"/>
+                </a:solidFill>
+                <a:latin typeface="Calibri"/>
+              </a:rPr>
+              <a:t>: no hay que crear cuenta ni instalar nada.</a:t>
             </a:r>
           </a:p>
           <a:p>
@@ -5285,31 +5445,31 @@
               </a:spcAft>
             </a:pPr>
             <a:r>
-              <a:rPr sz="1400" b="0" i="0">
-                <a:solidFill>
-                  <a:srgbClr val="2B2B2B"/>
-                </a:solidFill>
-                <a:latin typeface="Calibri"/>
-              </a:rPr>
-              <a:t>–   Tablero oficial: </a:t>
-            </a:r>
-            <a:r>
-              <a:rPr sz="1400" b="1" i="0">
-                <a:solidFill>
-                  <a:srgbClr val="2B2B2B"/>
-                </a:solidFill>
-                <a:latin typeface="Calibri"/>
-              </a:rPr>
-              <a:t>Padlet</a:t>
-            </a:r>
-            <a:r>
-              <a:rPr sz="1400" b="0" i="0">
-                <a:solidFill>
-                  <a:srgbClr val="2B2B2B"/>
-                </a:solidFill>
-                <a:latin typeface="Calibri"/>
-              </a:rPr>
-              <a:t> (mismo enlace en los 5 cursos).</a:t>
+              <a:rPr sz="1300" b="0" i="0">
+                <a:solidFill>
+                  <a:srgbClr val="2B2B2B"/>
+                </a:solidFill>
+                <a:latin typeface="Calibri"/>
+              </a:rPr>
+              <a:t>–   </a:t>
+            </a:r>
+            <a:r>
+              <a:rPr sz="1300" b="1" i="0">
+                <a:solidFill>
+                  <a:srgbClr val="2B2B2B"/>
+                </a:solidFill>
+                <a:latin typeface="Calibri"/>
+              </a:rPr>
+              <a:t>Ahora, ~3 min.</a:t>
+            </a:r>
+            <a:r>
+              <a:rPr sz="1300" b="0" i="0">
+                <a:solidFill>
+                  <a:srgbClr val="2B2B2B"/>
+                </a:solidFill>
+                <a:latin typeface="Calibri"/>
+              </a:rPr>
+              <a:t> Somos 50: no alcanzamos a presentarnos uno por uno, así que el formulario nos ordena.</a:t>
             </a:r>
           </a:p>
           <a:p>
@@ -5319,13 +5479,171 @@
               </a:spcAft>
             </a:pPr>
             <a:r>
-              <a:rPr sz="1400" b="0" i="0">
-                <a:solidFill>
-                  <a:srgbClr val="2B2B2B"/>
-                </a:solidFill>
-                <a:latin typeface="Calibri"/>
-              </a:rPr>
-              <a:t>–   Ahora (~7 min). Leemos juntos 3–4 notas (sin juzgar).</a:t>
+              <a:rPr sz="1300" b="0" i="0">
+                <a:solidFill>
+                  <a:srgbClr val="2B2B2B"/>
+                </a:solidFill>
+                <a:latin typeface="Calibri"/>
+              </a:rPr>
+              <a:t>–   </a:t>
+            </a:r>
+            <a:r>
+              <a:rPr sz="1300" b="1" i="0">
+                <a:solidFill>
+                  <a:srgbClr val="2B2B2B"/>
+                </a:solidFill>
+                <a:latin typeface="Calibri"/>
+              </a:rPr>
+              <a:t>Con eso, hoy:</a:t>
+            </a:r>
+            <a:r>
+              <a:rPr sz="1300" b="0" i="0">
+                <a:solidFill>
+                  <a:srgbClr val="2B2B2B"/>
+                </a:solidFill>
+                <a:latin typeface="Calibri"/>
+              </a:rPr>
+              <a:t> el Docente lee en voz alta </a:t>
+            </a:r>
+            <a:r>
+              <a:rPr sz="1300" b="1" i="0">
+                <a:solidFill>
+                  <a:srgbClr val="2B2B2B"/>
+                </a:solidFill>
+                <a:latin typeface="Calibri"/>
+              </a:rPr>
+              <a:t>5 o 6 respuestas</a:t>
+            </a:r>
+            <a:r>
+              <a:rPr sz="1300" b="0" i="0">
+                <a:solidFill>
+                  <a:srgbClr val="2B2B2B"/>
+                </a:solidFill>
+                <a:latin typeface="Calibri"/>
+              </a:rPr>
+              <a:t> y proyecta el </a:t>
+            </a:r>
+            <a:r>
+              <a:rPr sz="1300" b="1" i="0">
+                <a:solidFill>
+                  <a:srgbClr val="2B2B2B"/>
+                </a:solidFill>
+                <a:latin typeface="Calibri"/>
+              </a:rPr>
+              <a:t>resumen</a:t>
+            </a:r>
+            <a:r>
+              <a:rPr sz="1300" b="0" i="0">
+                <a:solidFill>
+                  <a:srgbClr val="2B2B2B"/>
+                </a:solidFill>
+                <a:latin typeface="Calibri"/>
+              </a:rPr>
+              <a:t> del formulario — ahí quedan todas a la vista, no solo las leídas.</a:t>
+            </a:r>
+          </a:p>
+          <a:p>
+            <a:pPr>
+              <a:spcAft>
+                <a:spcPts val="1000"/>
+              </a:spcAft>
+            </a:pPr>
+            <a:r>
+              <a:rPr sz="1300" b="0" i="0">
+                <a:solidFill>
+                  <a:srgbClr val="2B2B2B"/>
+                </a:solidFill>
+                <a:latin typeface="Calibri"/>
+              </a:rPr>
+              <a:t>–   </a:t>
+            </a:r>
+            <a:r>
+              <a:rPr sz="1300" b="1" i="0">
+                <a:solidFill>
+                  <a:srgbClr val="2B2B2B"/>
+                </a:solidFill>
+                <a:latin typeface="Calibri"/>
+              </a:rPr>
+              <a:t>En vivo:</a:t>
+            </a:r>
+            <a:r>
+              <a:rPr sz="1300" b="0" i="0">
+                <a:solidFill>
+                  <a:srgbClr val="2B2B2B"/>
+                </a:solidFill>
+                <a:latin typeface="Calibri"/>
+              </a:rPr>
+              <a:t> las preguntas y las votaciones van por la </a:t>
+            </a:r>
+            <a:r>
+              <a:rPr sz="1300" b="1" i="0">
+                <a:solidFill>
+                  <a:srgbClr val="2B2B2B"/>
+                </a:solidFill>
+                <a:latin typeface="Calibri"/>
+              </a:rPr>
+              <a:t>encuesta</a:t>
+            </a:r>
+            <a:r>
+              <a:rPr sz="1300" b="0" i="0">
+                <a:solidFill>
+                  <a:srgbClr val="2B2B2B"/>
+                </a:solidFill>
+                <a:latin typeface="Calibri"/>
+              </a:rPr>
+              <a:t> y el </a:t>
+            </a:r>
+            <a:r>
+              <a:rPr sz="1300" b="1" i="0">
+                <a:solidFill>
+                  <a:srgbClr val="2B2B2B"/>
+                </a:solidFill>
+                <a:latin typeface="Calibri"/>
+              </a:rPr>
+              <a:t>Q&amp;A</a:t>
+            </a:r>
+            <a:r>
+              <a:rPr sz="1300" b="0" i="0">
+                <a:solidFill>
+                  <a:srgbClr val="2B2B2B"/>
+                </a:solidFill>
+                <a:latin typeface="Calibri"/>
+              </a:rPr>
+              <a:t> del propio Meet; no hay que abrir ninguna otra plataforma.</a:t>
+            </a:r>
+          </a:p>
+          <a:p>
+            <a:pPr>
+              <a:spcAft>
+                <a:spcPts val="1000"/>
+              </a:spcAft>
+            </a:pPr>
+            <a:r>
+              <a:rPr sz="1300" b="0" i="0">
+                <a:solidFill>
+                  <a:srgbClr val="2B2B2B"/>
+                </a:solidFill>
+                <a:latin typeface="Calibri"/>
+              </a:rPr>
+              <a:t>–   </a:t>
+            </a:r>
+            <a:r>
+              <a:rPr sz="1300" b="1" i="0">
+                <a:solidFill>
+                  <a:srgbClr val="2B2B2B"/>
+                </a:solidFill>
+                <a:latin typeface="Calibri"/>
+              </a:rPr>
+              <a:t>Después:</a:t>
+            </a:r>
+            <a:r>
+              <a:rPr sz="1300" b="0" i="0">
+                <a:solidFill>
+                  <a:srgbClr val="2B2B2B"/>
+                </a:solidFill>
+                <a:latin typeface="Calibri"/>
+              </a:rPr>
+              <a:t> las respuestas quedan en una hoja que el Docente usa todo el periodo (equipos, ejemplos y seguimiento).</a:t>
             </a:r>
           </a:p>
         </p:txBody>
@@ -5374,40 +5692,16 @@
           </a:p>
         </p:txBody>
       </p:sp>
-      <p:pic>
-        <p:nvPicPr>
-          <p:cNvPr id="7" name="Picture 6" descr="qr_presentacion_estudiantes.png"/>
-          <p:cNvPicPr>
-            <a:picLocks noChangeAspect="1"/>
-          </p:cNvPicPr>
-          <p:nvPr/>
-        </p:nvPicPr>
-        <p:blipFill>
-          <a:blip r:embed="rId2"/>
-          <a:stretch>
-            <a:fillRect/>
-          </a:stretch>
-        </p:blipFill>
-        <p:spPr>
-          <a:xfrm>
-            <a:off x="8442655" y="2103120"/>
-            <a:ext cx="3108960" cy="3108960"/>
-          </a:xfrm>
-          <a:prstGeom prst="rect">
-            <a:avLst/>
-          </a:prstGeom>
-        </p:spPr>
-      </p:pic>
-      <p:sp>
-        <p:nvSpPr>
-          <p:cNvPr id="8" name="TextBox 7"/>
+      <p:sp>
+        <p:nvSpPr>
+          <p:cNvPr id="7" name="TextBox 6"/>
           <p:cNvSpPr txBox="1"/>
           <p:nvPr/>
         </p:nvSpPr>
         <p:spPr>
           <a:xfrm>
-            <a:off x="8332927" y="5230367"/>
-            <a:ext cx="3328415" cy="256032"/>
+            <a:off x="8579815" y="2926079"/>
+            <a:ext cx="2834640" cy="1463040"/>
           </a:xfrm>
           <a:prstGeom prst="rect">
             <a:avLst/>
@@ -5415,34 +5709,50 @@
           <a:noFill/>
         </p:spPr>
         <p:txBody>
-          <a:bodyPr wrap="square" anchor="t" lIns="0" rIns="0" tIns="0" bIns="0">
+          <a:bodyPr wrap="square" anchor="ctr" lIns="0" rIns="0" tIns="0" bIns="0">
             <a:spAutoFit/>
           </a:bodyPr>
           <a:lstStyle/>
           <a:p>
             <a:pPr algn="ctr"/>
             <a:r>
-              <a:rPr sz="1200" b="1" i="0">
+              <a:rPr sz="1800" b="1" i="0">
                 <a:solidFill>
                   <a:srgbClr val="0C2340"/>
                 </a:solidFill>
                 <a:latin typeface="Calibri"/>
               </a:rPr>
-              <a:t>Escanea o abre</a:t>
-            </a:r>
-          </a:p>
-        </p:txBody>
-      </p:sp>
-      <p:sp>
-        <p:nvSpPr>
-          <p:cNvPr id="9" name="TextBox 8"/>
+              <a:t>QR pendiente</a:t>
+            </a:r>
+          </a:p>
+          <a:p>
+            <a:pPr algn="ctr">
+              <a:spcBef>
+                <a:spcPts val="1000"/>
+              </a:spcBef>
+            </a:pPr>
+            <a:r>
+              <a:rPr sz="1200" b="0" i="0">
+                <a:solidFill>
+                  <a:srgbClr val="2B2B2B"/>
+                </a:solidFill>
+                <a:latin typeface="Calibri"/>
+              </a:rPr>
+              <a:t>Se genera cuando el formulario tenga enlace real.</a:t>
+            </a:r>
+          </a:p>
+        </p:txBody>
+      </p:sp>
+      <p:sp>
+        <p:nvSpPr>
+          <p:cNvPr id="8" name="TextBox 7"/>
           <p:cNvSpPr txBox="1"/>
           <p:nvPr/>
         </p:nvSpPr>
         <p:spPr>
           <a:xfrm>
-            <a:off x="8332927" y="5468112"/>
-            <a:ext cx="3328415" cy="411480"/>
+            <a:off x="8332927" y="5230367"/>
+            <a:ext cx="3328415" cy="640080"/>
           </a:xfrm>
           <a:prstGeom prst="rect">
             <a:avLst/>
@@ -5463,14 +5773,14 @@
                 </a:solidFill>
                 <a:latin typeface="Calibri"/>
               </a:rPr>
-              <a:t>https://padlet.com/andres_dfx/cun-wruz81hmf9k06gd7</a:t>
-            </a:r>
-          </a:p>
-        </p:txBody>
-      </p:sp>
-      <p:sp>
-        <p:nvSpPr>
-          <p:cNvPr id="10" name="TextBox 9"/>
+              <a:t>[URL Formulario Preséntate — pendiente · TRABAJO DE GRADO 2]</a:t>
+            </a:r>
+          </a:p>
+        </p:txBody>
+      </p:sp>
+      <p:sp>
+        <p:nvSpPr>
+          <p:cNvPr id="9" name="TextBox 8"/>
           <p:cNvSpPr txBox="1"/>
           <p:nvPr/>
         </p:nvSpPr>

--- a/Pregrado/Trabajo de grado 2/Clases/Presentacion del Curso - Trabajo de Grado 2.pptx
+++ b/Pregrado/Trabajo de grado 2/Clases/Presentacion del Curso - Trabajo de Grado 2.pptx
@@ -5237,7 +5237,7 @@
                 </a:solidFill>
                 <a:latin typeface="Calibri"/>
               </a:rPr>
-              <a:t>PRESÉNTATE — ROMPEHIELOS</a:t>
+              <a:t>ROMPEHIELOS — DOS VERDADES Y UNA MENTIRA</a:t>
             </a:r>
           </a:p>
         </p:txBody>
@@ -5272,7 +5272,7 @@
                 </a:solidFill>
                 <a:latin typeface="Calibri"/>
               </a:rPr>
-              <a:t>Formulario de Google · encuestas y Q&amp;A en el propio Meet</a:t>
+              <a:t>Dos verdades y una mentira · Slido · 8 minutos</a:t>
             </a:r>
           </a:p>
         </p:txBody>
@@ -5320,7 +5320,7 @@
                 </a:solidFill>
                 <a:latin typeface="Calibri"/>
               </a:rPr>
-              <a:t>Escanea el QR o abre:</a:t>
+              <a:t>Entra a slido.com</a:t>
             </a:r>
             <a:r>
               <a:rPr sz="1300" b="0" i="0">
@@ -5329,7 +5329,25 @@
                 </a:solidFill>
                 <a:latin typeface="Calibri"/>
               </a:rPr>
-              <a:t> [URL Formulario Preséntate — pendiente · TRABAJO DE GRADO 2]</a:t>
+              <a:t> y escribe el </a:t>
+            </a:r>
+            <a:r>
+              <a:rPr sz="1300" b="1" i="0">
+                <a:solidFill>
+                  <a:srgbClr val="2B2B2B"/>
+                </a:solidFill>
+                <a:latin typeface="Calibri"/>
+              </a:rPr>
+              <a:t>código del evento</a:t>
+            </a:r>
+            <a:r>
+              <a:rPr sz="1300" b="0" i="0">
+                <a:solidFill>
+                  <a:srgbClr val="2B2B2B"/>
+                </a:solidFill>
+                <a:latin typeface="Calibri"/>
+              </a:rPr>
+              <a:t> que el Docente pega en el chat del Meet. Sin cuenta ni instalar nada.</a:t>
             </a:r>
           </a:p>
           <a:p>
@@ -5354,7 +5372,7 @@
                 </a:solidFill>
                 <a:latin typeface="Calibri"/>
               </a:rPr>
-              <a:t>Qué respondes (1 min):</a:t>
+              <a:t>El juego:</a:t>
             </a:r>
             <a:r>
               <a:rPr sz="1300" b="0" i="0">
@@ -5363,7 +5381,7 @@
                 </a:solidFill>
                 <a:latin typeface="Calibri"/>
               </a:rPr>
-              <a:t> tu </a:t>
+              <a:t> «</a:t>
             </a:r>
             <a:r>
               <a:rPr sz="1300" b="1" i="0">
@@ -5372,7 +5390,7 @@
                 </a:solidFill>
                 <a:latin typeface="Calibri"/>
               </a:rPr>
-              <a:t>nombre</a:t>
+              <a:t>dos verdades y una mentira</a:t>
             </a:r>
             <a:r>
               <a:rPr sz="1300" b="0" i="0">
@@ -5381,7 +5399,7 @@
                 </a:solidFill>
                 <a:latin typeface="Calibri"/>
               </a:rPr>
-              <a:t> + el </a:t>
+              <a:t>» sobre el Docente. Se proyectan tres frases suyas y votas </a:t>
             </a:r>
             <a:r>
               <a:rPr sz="1300" b="1" i="0">
@@ -5390,7 +5408,7 @@
                 </a:solidFill>
                 <a:latin typeface="Calibri"/>
               </a:rPr>
-              <a:t>estado actual</a:t>
+              <a:t>cuál de las tres NO es cierta</a:t>
             </a:r>
             <a:r>
               <a:rPr sz="1300" b="0" i="0">
@@ -5399,7 +5417,7 @@
                 </a:solidFill>
                 <a:latin typeface="Calibri"/>
               </a:rPr>
-              <a:t> de tu proyecto (1 frase) + tu </a:t>
+              <a:t> — acertar es </a:t>
             </a:r>
             <a:r>
               <a:rPr sz="1300" b="1" i="0">
@@ -5408,7 +5426,7 @@
                 </a:solidFill>
                 <a:latin typeface="Calibri"/>
               </a:rPr>
-              <a:t>expectativa de TG2</a:t>
+              <a:t>1 entre 3</a:t>
             </a:r>
             <a:r>
               <a:rPr sz="1300" b="0" i="0">
@@ -5417,25 +5435,7 @@
                 </a:solidFill>
                 <a:latin typeface="Calibri"/>
               </a:rPr>
-              <a:t>. Entras con tu correo </a:t>
-            </a:r>
-            <a:r>
-              <a:rPr sz="1300" b="1" i="0">
-                <a:solidFill>
-                  <a:srgbClr val="2B2B2B"/>
-                </a:solidFill>
-                <a:latin typeface="Calibri"/>
-              </a:rPr>
-              <a:t>@cun.edu.co</a:t>
-            </a:r>
-            <a:r>
-              <a:rPr sz="1300" b="0" i="0">
-                <a:solidFill>
-                  <a:srgbClr val="2B2B2B"/>
-                </a:solidFill>
-                <a:latin typeface="Calibri"/>
-              </a:rPr>
-              <a:t>: no hay que crear cuenta ni instalar nada.</a:t>
+              <a:t>, así que arrancamos todos iguales.</a:t>
             </a:r>
           </a:p>
           <a:p>
@@ -5460,7 +5460,7 @@
                 </a:solidFill>
                 <a:latin typeface="Calibri"/>
               </a:rPr>
-              <a:t>Ahora, ~3 min.</a:t>
+              <a:t>Tres rondas (~4 min).</a:t>
             </a:r>
             <a:r>
               <a:rPr sz="1300" b="0" i="0">
@@ -5469,7 +5469,7 @@
                 </a:solidFill>
                 <a:latin typeface="Calibri"/>
               </a:rPr>
-              <a:t> Somos 50: no alcanzamos a presentarnos uno por uno, así que el formulario nos ordena.</a:t>
+              <a:t> Al cerrar cada una el Docente revela la mentira y cuenta la historia de la verdad más rara: ahí queda hecha su presentación.</a:t>
             </a:r>
           </a:p>
           <a:p>
@@ -5494,7 +5494,7 @@
                 </a:solidFill>
                 <a:latin typeface="Calibri"/>
               </a:rPr>
-              <a:t>Con eso, hoy:</a:t>
+              <a:t>Ronda final (~2 min):</a:t>
             </a:r>
             <a:r>
               <a:rPr sz="1300" b="0" i="0">
@@ -5503,7 +5503,7 @@
                 </a:solidFill>
                 <a:latin typeface="Calibri"/>
               </a:rPr>
-              <a:t> el Docente lee en voz alta </a:t>
+              <a:t> sale la tabla de posiciones y los </a:t>
             </a:r>
             <a:r>
               <a:rPr sz="1300" b="1" i="0">
@@ -5512,7 +5512,7 @@
                 </a:solidFill>
                 <a:latin typeface="Calibri"/>
               </a:rPr>
-              <a:t>5 o 6 respuestas</a:t>
+              <a:t>tres primeros</a:t>
             </a:r>
             <a:r>
               <a:rPr sz="1300" b="0" i="0">
@@ -5521,7 +5521,7 @@
                 </a:solidFill>
                 <a:latin typeface="Calibri"/>
               </a:rPr>
-              <a:t> y proyecta el </a:t>
+              <a:t> toman el micrófono con </a:t>
             </a:r>
             <a:r>
               <a:rPr sz="1300" b="1" i="0">
@@ -5530,7 +5530,7 @@
                 </a:solidFill>
                 <a:latin typeface="Calibri"/>
               </a:rPr>
-              <a:t>resumen</a:t>
+              <a:t>sus</a:t>
             </a:r>
             <a:r>
               <a:rPr sz="1300" b="0" i="0">
@@ -5539,7 +5539,7 @@
                 </a:solidFill>
                 <a:latin typeface="Calibri"/>
               </a:rPr>
-              <a:t> del formulario — ahí quedan todas a la vista, no solo las leídas.</a:t>
+              <a:t> dos verdades y una mentira. Gana quien engañe a más gente. Hablan tres, no 50.</a:t>
             </a:r>
           </a:p>
           <a:p>
@@ -5564,7 +5564,7 @@
                 </a:solidFill>
                 <a:latin typeface="Calibri"/>
               </a:rPr>
-              <a:t>En vivo:</a:t>
+              <a:t>Premio:</a:t>
             </a:r>
             <a:r>
               <a:rPr sz="1300" b="0" i="0">
@@ -5573,7 +5573,7 @@
                 </a:solidFill>
                 <a:latin typeface="Calibri"/>
               </a:rPr>
-              <a:t> las preguntas y las votaciones van por la </a:t>
+              <a:t> </a:t>
             </a:r>
             <a:r>
               <a:rPr sz="1300" b="1" i="0">
@@ -5582,7 +5582,7 @@
                 </a:solidFill>
                 <a:latin typeface="Calibri"/>
               </a:rPr>
-              <a:t>encuesta</a:t>
+              <a:t>revisión 1 a 1 con el Docente</a:t>
             </a:r>
             <a:r>
               <a:rPr sz="1300" b="0" i="0">
@@ -5591,25 +5591,7 @@
                 </a:solidFill>
                 <a:latin typeface="Calibri"/>
               </a:rPr>
-              <a:t> y el </a:t>
-            </a:r>
-            <a:r>
-              <a:rPr sz="1300" b="1" i="0">
-                <a:solidFill>
-                  <a:srgbClr val="2B2B2B"/>
-                </a:solidFill>
-                <a:latin typeface="Calibri"/>
-              </a:rPr>
-              <a:t>Q&amp;A</a:t>
-            </a:r>
-            <a:r>
-              <a:rPr sz="1300" b="0" i="0">
-                <a:solidFill>
-                  <a:srgbClr val="2B2B2B"/>
-                </a:solidFill>
-                <a:latin typeface="Calibri"/>
-              </a:rPr>
-              <a:t> del propio Meet; no hay que abrir ninguna otra plataforma.</a:t>
+              <a:t> del avance del ganador, antes de la primera entrega.</a:t>
             </a:r>
           </a:p>
           <a:p>
@@ -5634,7 +5616,7 @@
                 </a:solidFill>
                 <a:latin typeface="Calibri"/>
               </a:rPr>
-              <a:t>Después:</a:t>
+              <a:t>Las preguntas</a:t>
             </a:r>
             <a:r>
               <a:rPr sz="1300" b="0" i="0">
@@ -5643,7 +5625,25 @@
                 </a:solidFill>
                 <a:latin typeface="Calibri"/>
               </a:rPr>
-              <a:t> las respuestas quedan en una hoja que el Docente usa todo el periodo (equipos, ejemplos y seguimiento).</a:t>
+              <a:t> de toda la sesión van por el </a:t>
+            </a:r>
+            <a:r>
+              <a:rPr sz="1300" b="1" i="0">
+                <a:solidFill>
+                  <a:srgbClr val="2B2B2B"/>
+                </a:solidFill>
+                <a:latin typeface="Calibri"/>
+              </a:rPr>
+              <a:t>Q&amp;A</a:t>
+            </a:r>
+            <a:r>
+              <a:rPr sz="1300" b="0" i="0">
+                <a:solidFill>
+                  <a:srgbClr val="2B2B2B"/>
+                </a:solidFill>
+                <a:latin typeface="Calibri"/>
+              </a:rPr>
+              <a:t> del mismo Slido.</a:t>
             </a:r>
           </a:p>
         </p:txBody>
@@ -5700,8 +5700,8 @@
         </p:nvSpPr>
         <p:spPr>
           <a:xfrm>
-            <a:off x="8579815" y="2926079"/>
-            <a:ext cx="2834640" cy="1463040"/>
+            <a:off x="8534095" y="2606039"/>
+            <a:ext cx="2926079" cy="2103120"/>
           </a:xfrm>
           <a:prstGeom prst="rect">
             <a:avLst/>
@@ -5716,29 +5716,65 @@
           <a:p>
             <a:pPr algn="ctr"/>
             <a:r>
-              <a:rPr sz="1800" b="1" i="0">
-                <a:solidFill>
-                  <a:srgbClr val="0C2340"/>
-                </a:solidFill>
-                <a:latin typeface="Calibri"/>
-              </a:rPr>
-              <a:t>QR pendiente</a:t>
+              <a:rPr sz="3000" b="1" i="0">
+                <a:solidFill>
+                  <a:srgbClr val="007433"/>
+                </a:solidFill>
+                <a:latin typeface="Calibri"/>
+              </a:rPr>
+              <a:t>slido.com</a:t>
             </a:r>
           </a:p>
           <a:p>
             <a:pPr algn="ctr">
               <a:spcBef>
-                <a:spcPts val="1000"/>
+                <a:spcPts val="1400"/>
               </a:spcBef>
             </a:pPr>
             <a:r>
-              <a:rPr sz="1200" b="0" i="0">
-                <a:solidFill>
-                  <a:srgbClr val="2B2B2B"/>
-                </a:solidFill>
-                <a:latin typeface="Calibri"/>
-              </a:rPr>
-              <a:t>Se genera cuando el formulario tenga enlace real.</a:t>
+              <a:rPr sz="1300" b="0" i="0">
+                <a:solidFill>
+                  <a:srgbClr val="0C2340"/>
+                </a:solidFill>
+                <a:latin typeface="Calibri"/>
+              </a:rPr>
+              <a:t>El </a:t>
+            </a:r>
+            <a:r>
+              <a:rPr sz="1300" b="1" i="0">
+                <a:solidFill>
+                  <a:srgbClr val="0C2340"/>
+                </a:solidFill>
+                <a:latin typeface="Calibri"/>
+              </a:rPr>
+              <a:t>código del evento</a:t>
+            </a:r>
+            <a:r>
+              <a:rPr sz="1300" b="0" i="0">
+                <a:solidFill>
+                  <a:srgbClr val="0C2340"/>
+                </a:solidFill>
+                <a:latin typeface="Calibri"/>
+              </a:rPr>
+              <a:t> te lo pega el Docente en el </a:t>
+            </a:r>
+            <a:r>
+              <a:rPr sz="1300" b="1" i="0">
+                <a:solidFill>
+                  <a:srgbClr val="0C2340"/>
+                </a:solidFill>
+                <a:latin typeface="Calibri"/>
+              </a:rPr>
+              <a:t>chat del Meet</a:t>
+            </a:r>
+            <a:r>
+              <a:rPr sz="1300" b="0" i="0">
+                <a:solidFill>
+                  <a:srgbClr val="0C2340"/>
+                </a:solidFill>
+                <a:latin typeface="Calibri"/>
+              </a:rPr>
+              <a:t>.</a:t>
             </a:r>
           </a:p>
         </p:txBody>
@@ -5773,7 +5809,7 @@
                 </a:solidFill>
                 <a:latin typeface="Calibri"/>
               </a:rPr>
-              <a:t>[URL Formulario Preséntate — pendiente · TRABAJO DE GRADO 2]</a:t>
+              <a:t>[URL Slido — evento del rompehielos pendiente · TRABAJO DE GRADO 2]</a:t>
             </a:r>
           </a:p>
         </p:txBody>
